--- a/public/fun/pack/pptx/family/가족소개_33_3대가족_완행열차.pptx
+++ b/public/fun/pack/pptx/family/가족소개_33_3대가족_완행열차.pptx
@@ -3286,6 +3286,14 @@
 <file path=ppt/slides/slide1.xml><?xml version="1.0" encoding="utf-8"?>
 <p:sld xmlns:a="http://schemas.openxmlformats.org/drawingml/2006/main" xmlns:p="http://schemas.openxmlformats.org/presentationml/2006/main" xmlns:r="http://schemas.openxmlformats.org/officeDocument/2006/relationships">
   <p:cSld>
+    <p:bg>
+      <p:bgPr>
+        <a:solidFill>
+          <a:srgbClr val="FBF1EC"/>
+        </a:solidFill>
+        <a:effectLst/>
+      </p:bgPr>
+    </p:bg>
     <p:spTree>
       <p:nvGrpSpPr>
         <p:cNvPr id="1" name=""/>
@@ -3293,30 +3301,116 @@
         <p:nvPr/>
       </p:nvGrpSpPr>
       <p:grpSpPr/>
-      <p:pic>
-        <p:nvPicPr>
-          <p:cNvPr id="3" name="표지 그림" descr="family-33.jpg"/>
-          <p:cNvPicPr>
-            <a:picLocks noChangeAspect="1"/>
-          </p:cNvPicPr>
-          <p:nvPr/>
-        </p:nvPicPr>
-        <p:blipFill>
-          <a:blip r:embed="rId2"/>
-          <a:stretch>
-            <a:fillRect/>
-          </a:stretch>
-        </p:blipFill>
+      <p:sp>
+        <p:nvSpPr>
+          <p:cNvPr id="3" name="사진 자리"/>
+          <p:cNvSpPr/>
+          <p:nvPr/>
+        </p:nvSpPr>
         <p:spPr>
           <a:xfrm>
             <a:off x="0" y="0"/>
-            <a:ext cx="12191695" cy="6858000"/>
+            <a:ext cx="4389010" cy="6858000"/>
           </a:xfrm>
           <a:prstGeom prst="rect">
             <a:avLst/>
           </a:prstGeom>
-        </p:spPr>
-      </p:pic>
+          <a:solidFill>
+            <a:srgbClr val="EBC0AD"/>
+          </a:solidFill>
+          <a:ln>
+            <a:noFill/>
+          </a:ln>
+        </p:spPr>
+        <p:txBody>
+          <a:bodyPr rtlCol="0" anchor="ctr" wrap="square" lIns="54864" rIns="54864" tIns="27432" bIns="27432">
+            <a:noAutofit/>
+          </a:bodyPr>
+          <a:lstStyle/>
+          <a:p>
+            <a:pPr algn="ctr">
+              <a:lnSpc>
+                <a:spcPct val="100000"/>
+              </a:lnSpc>
+            </a:pPr>
+            <a:r>
+              <a:rPr sz="1400" b="0" i="0">
+                <a:solidFill>
+                  <a:srgbClr val="493127"/>
+                </a:solidFill>
+              </a:rPr>
+              <a:t>사진을 넣어 주세요</a:t>
+            </a:r>
+          </a:p>
+        </p:txBody>
+      </p:sp>
+      <p:sp>
+        <p:nvSpPr>
+          <p:cNvPr id="4" name="장식"/>
+          <p:cNvSpPr/>
+          <p:nvPr/>
+        </p:nvSpPr>
+        <p:spPr>
+          <a:xfrm>
+            <a:off x="365750" y="365760"/>
+            <a:ext cx="3657508" cy="6126480"/>
+          </a:xfrm>
+          <a:prstGeom prst="rect">
+            <a:avLst/>
+          </a:prstGeom>
+          <a:noFill/>
+          <a:ln w="9525">
+            <a:solidFill>
+              <a:srgbClr val="26231F"/>
+            </a:solidFill>
+          </a:ln>
+        </p:spPr>
+        <p:txBody>
+          <a:bodyPr rtlCol="0" anchor="ctr"/>
+          <a:lstStyle/>
+          <a:p>
+            <a:pPr algn="ctr"/>
+          </a:p>
+        </p:txBody>
+      </p:sp>
+      <p:sp>
+        <p:nvSpPr>
+          <p:cNvPr id="5" name="라벨"/>
+          <p:cNvSpPr txBox="1"/>
+          <p:nvPr/>
+        </p:nvSpPr>
+        <p:spPr>
+          <a:xfrm>
+            <a:off x="6827349" y="2148840"/>
+            <a:ext cx="4632844" cy="274320"/>
+          </a:xfrm>
+          <a:prstGeom prst="rect">
+            <a:avLst/>
+          </a:prstGeom>
+          <a:noFill/>
+        </p:spPr>
+        <p:txBody>
+          <a:bodyPr wrap="square" lIns="54864" rIns="54864" tIns="27432" bIns="27432" anchor="t">
+            <a:noAutofit/>
+          </a:bodyPr>
+          <a:lstStyle/>
+          <a:p>
+            <a:pPr algn="l">
+              <a:lnSpc>
+                <a:spcPct val="115000"/>
+              </a:lnSpc>
+            </a:pPr>
+            <a:r>
+              <a:rPr sz="1000" b="1" i="0" spc="250">
+                <a:solidFill>
+                  <a:srgbClr val="26231F"/>
+                </a:solidFill>
+              </a:rPr>
+              <a:t>FAMILY ALBUM</a:t>
+            </a:r>
+          </a:p>
+        </p:txBody>
+      </p:sp>
       <p:sp>
         <p:nvSpPr>
           <p:cNvPr id="2" name="Title 1"/>
@@ -3329,8 +3423,8 @@
         </p:nvSpPr>
         <p:spPr>
           <a:xfrm>
-            <a:off x="853418" y="2057400"/>
-            <a:ext cx="6095847" cy="1554480"/>
+            <a:off x="6827349" y="2606040"/>
+            <a:ext cx="4632844" cy="1188720"/>
           </a:xfrm>
         </p:spPr>
         <p:txBody>
@@ -3345,9 +3439,9 @@
               </a:lnSpc>
             </a:pPr>
             <a:r>
-              <a:rPr sz="3600" b="1" i="0">
-                <a:solidFill>
-                  <a:srgbClr val="422D24"/>
+              <a:rPr sz="4000" b="1" i="0">
+                <a:solidFill>
+                  <a:srgbClr val="26231F"/>
                 </a:solidFill>
               </a:rPr>
               <a:t>우리 가족을 소개합니다</a:t>
@@ -3357,14 +3451,14 @@
       </p:sp>
       <p:sp>
         <p:nvSpPr>
-          <p:cNvPr id="4" name="한 줄 문구"/>
+          <p:cNvPr id="6" name="한 줄 문구"/>
           <p:cNvSpPr txBox="1"/>
           <p:nvPr/>
         </p:nvSpPr>
         <p:spPr>
           <a:xfrm>
-            <a:off x="853418" y="3749039"/>
-            <a:ext cx="6095847" cy="822960"/>
+            <a:off x="6827349" y="3886200"/>
+            <a:ext cx="4632844" cy="822960"/>
           </a:xfrm>
           <a:prstGeom prst="rect">
             <a:avLst/>
@@ -3383,9 +3477,9 @@
               </a:lnSpc>
             </a:pPr>
             <a:r>
-              <a:rPr sz="1700" b="0" i="1">
-                <a:solidFill>
-                  <a:srgbClr val="422D24"/>
+              <a:rPr sz="1700" b="0" i="0">
+                <a:solidFill>
+                  <a:srgbClr val="26231F"/>
                 </a:solidFill>
               </a:rPr>
               <a:t>완행열차 창가 자리에 나란히</a:t>
@@ -3395,14 +3489,14 @@
       </p:sp>
       <p:sp>
         <p:nvSpPr>
-          <p:cNvPr id="5" name="안내 문구"/>
+          <p:cNvPr id="7" name="안내 문구"/>
           <p:cNvSpPr txBox="1"/>
           <p:nvPr/>
         </p:nvSpPr>
         <p:spPr>
           <a:xfrm>
-            <a:off x="853418" y="4617720"/>
-            <a:ext cx="6095847" cy="914400"/>
+            <a:off x="6827349" y="4754880"/>
+            <a:ext cx="4632844" cy="914400"/>
           </a:xfrm>
           <a:prstGeom prst="rect">
             <a:avLst/>
@@ -3423,10 +3517,10 @@
             <a:r>
               <a:rPr sz="1400" b="0" i="0">
                 <a:solidFill>
-                  <a:srgbClr val="666666"/>
-                </a:solidFill>
-              </a:rPr>
-              <a:t>3대 가족 · 2027. 00. 00</a:t>
+                  <a:srgbClr val="26231F"/>
+                </a:solidFill>
+              </a:rPr>
+              <a:t>3대 가족 · 날짜 입력</a:t>
             </a:r>
           </a:p>
         </p:txBody>
@@ -3445,7 +3539,7 @@
     <p:bg>
       <p:bgPr>
         <a:solidFill>
-          <a:srgbClr val="FFFFFF"/>
+          <a:srgbClr val="F6DFD5"/>
         </a:solidFill>
         <a:effectLst/>
       </p:bgPr>
@@ -3465,14 +3559,14 @@
         </p:nvSpPr>
         <p:spPr>
           <a:xfrm>
-            <a:off x="9905695" y="-1463040"/>
-            <a:ext cx="3840480" cy="3840480"/>
-          </a:xfrm>
-          <a:prstGeom prst="ellipse">
+            <a:off x="640080" y="566928"/>
+            <a:ext cx="10911535" cy="10972"/>
+          </a:xfrm>
+          <a:prstGeom prst="rect">
             <a:avLst/>
           </a:prstGeom>
           <a:solidFill>
-            <a:srgbClr val="EBDCD6"/>
+            <a:srgbClr val="26231F"/>
           </a:solidFill>
           <a:ln>
             <a:noFill/>
@@ -3488,20 +3582,58 @@
       </p:sp>
       <p:sp>
         <p:nvSpPr>
-          <p:cNvPr id="4" name="장식"/>
+          <p:cNvPr id="4" name="상단 라벨"/>
+          <p:cNvSpPr txBox="1"/>
+          <p:nvPr/>
+        </p:nvSpPr>
+        <p:spPr>
+          <a:xfrm>
+            <a:off x="640080" y="237744"/>
+            <a:ext cx="5486400" cy="274320"/>
+          </a:xfrm>
+          <a:prstGeom prst="rect">
+            <a:avLst/>
+          </a:prstGeom>
+          <a:noFill/>
+        </p:spPr>
+        <p:txBody>
+          <a:bodyPr wrap="square" lIns="54864" rIns="54864" tIns="27432" bIns="27432" anchor="ctr">
+            <a:noAutofit/>
+          </a:bodyPr>
+          <a:lstStyle/>
+          <a:p>
+            <a:pPr algn="l">
+              <a:lnSpc>
+                <a:spcPct val="115000"/>
+              </a:lnSpc>
+            </a:pPr>
+            <a:r>
+              <a:rPr sz="900" b="1" i="0" spc="250">
+                <a:solidFill>
+                  <a:srgbClr val="26231F"/>
+                </a:solidFill>
+              </a:rPr>
+              <a:t>FAMILY ALBUM</a:t>
+            </a:r>
+          </a:p>
+        </p:txBody>
+      </p:sp>
+      <p:sp>
+        <p:nvSpPr>
+          <p:cNvPr id="5" name="포인트"/>
           <p:cNvSpPr/>
           <p:nvPr/>
         </p:nvSpPr>
         <p:spPr>
           <a:xfrm>
-            <a:off x="11094415" y="274320"/>
-            <a:ext cx="411480" cy="411480"/>
+            <a:off x="11204143" y="246888"/>
+            <a:ext cx="237744" cy="237744"/>
           </a:xfrm>
           <a:prstGeom prst="ellipse">
             <a:avLst/>
           </a:prstGeom>
           <a:solidFill>
-            <a:srgbClr val="855A47"/>
+            <a:srgbClr val="D89579"/>
           </a:solidFill>
           <a:ln>
             <a:noFill/>
@@ -3527,8 +3659,8 @@
         </p:nvSpPr>
         <p:spPr>
           <a:xfrm>
-            <a:off x="640080" y="457200"/>
-            <a:ext cx="9722815" cy="868680"/>
+            <a:off x="640080" y="731520"/>
+            <a:ext cx="10911535" cy="822960"/>
           </a:xfrm>
         </p:spPr>
         <p:txBody>
@@ -3545,7 +3677,7 @@
             <a:r>
               <a:rPr sz="3000" b="1" i="0">
                 <a:solidFill>
-                  <a:srgbClr val="422D24"/>
+                  <a:srgbClr val="26231F"/>
                 </a:solidFill>
               </a:rPr>
               <a:t>가족 구성원</a:t>
@@ -3555,25 +3687,23 @@
       </p:sp>
       <p:sp>
         <p:nvSpPr>
-          <p:cNvPr id="5" name="사진 자리"/>
+          <p:cNvPr id="6" name="사진 자리"/>
           <p:cNvSpPr/>
           <p:nvPr/>
         </p:nvSpPr>
         <p:spPr>
           <a:xfrm>
-            <a:off x="777240" y="1600200"/>
+            <a:off x="777240" y="1783080"/>
             <a:ext cx="1353769" cy="1353769"/>
           </a:xfrm>
           <a:prstGeom prst="ellipse">
             <a:avLst/>
           </a:prstGeom>
           <a:solidFill>
-            <a:srgbClr val="EBDCD6"/>
+            <a:srgbClr val="F6DFD5"/>
           </a:solidFill>
           <a:ln w="19050">
-            <a:solidFill>
-              <a:srgbClr val="855A47"/>
-            </a:solidFill>
+            <a:noFill/>
             <a:prstDash val="dash"/>
           </a:ln>
         </p:spPr>
@@ -3591,7 +3721,7 @@
             <a:r>
               <a:rPr sz="1200" b="0" i="0">
                 <a:solidFill>
-                  <a:srgbClr val="422D24"/>
+                  <a:srgbClr val="8E8780"/>
                 </a:solidFill>
               </a:rPr>
               <a:t>사진</a:t>
@@ -3601,13 +3731,13 @@
       </p:sp>
       <p:sp>
         <p:nvSpPr>
-          <p:cNvPr id="6" name="TextBox 5"/>
+          <p:cNvPr id="7" name="TextBox 6"/>
           <p:cNvSpPr txBox="1"/>
           <p:nvPr/>
         </p:nvSpPr>
         <p:spPr>
           <a:xfrm>
-            <a:off x="640080" y="3045409"/>
+            <a:off x="640080" y="3228289"/>
             <a:ext cx="1628089" cy="411480"/>
           </a:xfrm>
           <a:prstGeom prst="rect">
@@ -3629,7 +3759,7 @@
             <a:r>
               <a:rPr sz="1600" b="1" i="0">
                 <a:solidFill>
-                  <a:srgbClr val="422D24"/>
+                  <a:srgbClr val="493127"/>
                 </a:solidFill>
               </a:rPr>
               <a:t>할아버지</a:t>
@@ -3639,14 +3769,14 @@
       </p:sp>
       <p:sp>
         <p:nvSpPr>
-          <p:cNvPr id="7" name="TextBox 6"/>
+          <p:cNvPr id="8" name="TextBox 7"/>
           <p:cNvSpPr txBox="1"/>
           <p:nvPr/>
         </p:nvSpPr>
         <p:spPr>
           <a:xfrm>
-            <a:off x="731519" y="3502609"/>
-            <a:ext cx="1445209" cy="2898190"/>
+            <a:off x="731519" y="3685489"/>
+            <a:ext cx="1445209" cy="2669590"/>
           </a:xfrm>
           <a:prstGeom prst="rect">
             <a:avLst/>
@@ -3707,25 +3837,23 @@
       </p:sp>
       <p:sp>
         <p:nvSpPr>
-          <p:cNvPr id="8" name="사진 자리"/>
+          <p:cNvPr id="9" name="사진 자리"/>
           <p:cNvSpPr/>
           <p:nvPr/>
         </p:nvSpPr>
         <p:spPr>
           <a:xfrm>
-            <a:off x="2633929" y="1600200"/>
+            <a:off x="2633929" y="1783080"/>
             <a:ext cx="1353769" cy="1353769"/>
           </a:xfrm>
           <a:prstGeom prst="ellipse">
             <a:avLst/>
           </a:prstGeom>
           <a:solidFill>
-            <a:srgbClr val="EBDCD6"/>
+            <a:srgbClr val="F6DFD5"/>
           </a:solidFill>
           <a:ln w="19050">
-            <a:solidFill>
-              <a:srgbClr val="855A47"/>
-            </a:solidFill>
+            <a:noFill/>
             <a:prstDash val="dash"/>
           </a:ln>
         </p:spPr>
@@ -3743,7 +3871,7 @@
             <a:r>
               <a:rPr sz="1200" b="0" i="0">
                 <a:solidFill>
-                  <a:srgbClr val="422D24"/>
+                  <a:srgbClr val="8E8780"/>
                 </a:solidFill>
               </a:rPr>
               <a:t>사진</a:t>
@@ -3753,13 +3881,13 @@
       </p:sp>
       <p:sp>
         <p:nvSpPr>
-          <p:cNvPr id="9" name="TextBox 8"/>
+          <p:cNvPr id="10" name="TextBox 9"/>
           <p:cNvSpPr txBox="1"/>
           <p:nvPr/>
         </p:nvSpPr>
         <p:spPr>
           <a:xfrm>
-            <a:off x="2496769" y="3045409"/>
+            <a:off x="2496769" y="3228289"/>
             <a:ext cx="1628089" cy="411480"/>
           </a:xfrm>
           <a:prstGeom prst="rect">
@@ -3781,7 +3909,7 @@
             <a:r>
               <a:rPr sz="1600" b="1" i="0">
                 <a:solidFill>
-                  <a:srgbClr val="422D24"/>
+                  <a:srgbClr val="493127"/>
                 </a:solidFill>
               </a:rPr>
               <a:t>할머니</a:t>
@@ -3791,14 +3919,14 @@
       </p:sp>
       <p:sp>
         <p:nvSpPr>
-          <p:cNvPr id="10" name="TextBox 9"/>
+          <p:cNvPr id="11" name="TextBox 10"/>
           <p:cNvSpPr txBox="1"/>
           <p:nvPr/>
         </p:nvSpPr>
         <p:spPr>
           <a:xfrm>
-            <a:off x="2588209" y="3502609"/>
-            <a:ext cx="1445209" cy="2898190"/>
+            <a:off x="2588209" y="3685489"/>
+            <a:ext cx="1445209" cy="2669590"/>
           </a:xfrm>
           <a:prstGeom prst="rect">
             <a:avLst/>
@@ -3859,25 +3987,23 @@
       </p:sp>
       <p:sp>
         <p:nvSpPr>
-          <p:cNvPr id="11" name="사진 자리"/>
+          <p:cNvPr id="12" name="사진 자리"/>
           <p:cNvSpPr/>
           <p:nvPr/>
         </p:nvSpPr>
         <p:spPr>
           <a:xfrm>
-            <a:off x="4490618" y="1600200"/>
+            <a:off x="4490618" y="1783080"/>
             <a:ext cx="1353769" cy="1353769"/>
           </a:xfrm>
           <a:prstGeom prst="ellipse">
             <a:avLst/>
           </a:prstGeom>
           <a:solidFill>
-            <a:srgbClr val="EBDCD6"/>
+            <a:srgbClr val="F6DFD5"/>
           </a:solidFill>
           <a:ln w="19050">
-            <a:solidFill>
-              <a:srgbClr val="855A47"/>
-            </a:solidFill>
+            <a:noFill/>
             <a:prstDash val="dash"/>
           </a:ln>
         </p:spPr>
@@ -3895,7 +4021,7 @@
             <a:r>
               <a:rPr sz="1200" b="0" i="0">
                 <a:solidFill>
-                  <a:srgbClr val="422D24"/>
+                  <a:srgbClr val="8E8780"/>
                 </a:solidFill>
               </a:rPr>
               <a:t>사진</a:t>
@@ -3905,13 +4031,13 @@
       </p:sp>
       <p:sp>
         <p:nvSpPr>
-          <p:cNvPr id="12" name="TextBox 11"/>
+          <p:cNvPr id="13" name="TextBox 12"/>
           <p:cNvSpPr txBox="1"/>
           <p:nvPr/>
         </p:nvSpPr>
         <p:spPr>
           <a:xfrm>
-            <a:off x="4353458" y="3045409"/>
+            <a:off x="4353458" y="3228289"/>
             <a:ext cx="1628089" cy="411480"/>
           </a:xfrm>
           <a:prstGeom prst="rect">
@@ -3933,7 +4059,7 @@
             <a:r>
               <a:rPr sz="1600" b="1" i="0">
                 <a:solidFill>
-                  <a:srgbClr val="422D24"/>
+                  <a:srgbClr val="493127"/>
                 </a:solidFill>
               </a:rPr>
               <a:t>아빠</a:t>
@@ -3943,14 +4069,14 @@
       </p:sp>
       <p:sp>
         <p:nvSpPr>
-          <p:cNvPr id="13" name="TextBox 12"/>
+          <p:cNvPr id="14" name="TextBox 13"/>
           <p:cNvSpPr txBox="1"/>
           <p:nvPr/>
         </p:nvSpPr>
         <p:spPr>
           <a:xfrm>
-            <a:off x="4444898" y="3502609"/>
-            <a:ext cx="1445209" cy="2898190"/>
+            <a:off x="4444898" y="3685489"/>
+            <a:ext cx="1445209" cy="2669590"/>
           </a:xfrm>
           <a:prstGeom prst="rect">
             <a:avLst/>
@@ -4011,25 +4137,23 @@
       </p:sp>
       <p:sp>
         <p:nvSpPr>
-          <p:cNvPr id="14" name="사진 자리"/>
+          <p:cNvPr id="15" name="사진 자리"/>
           <p:cNvSpPr/>
           <p:nvPr/>
         </p:nvSpPr>
         <p:spPr>
           <a:xfrm>
-            <a:off x="6347307" y="1600200"/>
+            <a:off x="6347307" y="1783080"/>
             <a:ext cx="1353769" cy="1353769"/>
           </a:xfrm>
           <a:prstGeom prst="ellipse">
             <a:avLst/>
           </a:prstGeom>
           <a:solidFill>
-            <a:srgbClr val="EBDCD6"/>
+            <a:srgbClr val="F6DFD5"/>
           </a:solidFill>
           <a:ln w="19050">
-            <a:solidFill>
-              <a:srgbClr val="855A47"/>
-            </a:solidFill>
+            <a:noFill/>
             <a:prstDash val="dash"/>
           </a:ln>
         </p:spPr>
@@ -4047,7 +4171,7 @@
             <a:r>
               <a:rPr sz="1200" b="0" i="0">
                 <a:solidFill>
-                  <a:srgbClr val="422D24"/>
+                  <a:srgbClr val="8E8780"/>
                 </a:solidFill>
               </a:rPr>
               <a:t>사진</a:t>
@@ -4057,13 +4181,13 @@
       </p:sp>
       <p:sp>
         <p:nvSpPr>
-          <p:cNvPr id="15" name="TextBox 14"/>
+          <p:cNvPr id="16" name="TextBox 15"/>
           <p:cNvSpPr txBox="1"/>
           <p:nvPr/>
         </p:nvSpPr>
         <p:spPr>
           <a:xfrm>
-            <a:off x="6210147" y="3045409"/>
+            <a:off x="6210147" y="3228289"/>
             <a:ext cx="1628089" cy="411480"/>
           </a:xfrm>
           <a:prstGeom prst="rect">
@@ -4085,7 +4209,7 @@
             <a:r>
               <a:rPr sz="1600" b="1" i="0">
                 <a:solidFill>
-                  <a:srgbClr val="422D24"/>
+                  <a:srgbClr val="493127"/>
                 </a:solidFill>
               </a:rPr>
               <a:t>엄마</a:t>
@@ -4095,14 +4219,14 @@
       </p:sp>
       <p:sp>
         <p:nvSpPr>
-          <p:cNvPr id="16" name="TextBox 15"/>
+          <p:cNvPr id="17" name="TextBox 16"/>
           <p:cNvSpPr txBox="1"/>
           <p:nvPr/>
         </p:nvSpPr>
         <p:spPr>
           <a:xfrm>
-            <a:off x="6301587" y="3502609"/>
-            <a:ext cx="1445209" cy="2898190"/>
+            <a:off x="6301587" y="3685489"/>
+            <a:ext cx="1445209" cy="2669590"/>
           </a:xfrm>
           <a:prstGeom prst="rect">
             <a:avLst/>
@@ -4163,25 +4287,23 @@
       </p:sp>
       <p:sp>
         <p:nvSpPr>
-          <p:cNvPr id="17" name="사진 자리"/>
+          <p:cNvPr id="18" name="사진 자리"/>
           <p:cNvSpPr/>
           <p:nvPr/>
         </p:nvSpPr>
         <p:spPr>
           <a:xfrm>
-            <a:off x="8203996" y="1600200"/>
+            <a:off x="8203996" y="1783080"/>
             <a:ext cx="1353769" cy="1353769"/>
           </a:xfrm>
           <a:prstGeom prst="ellipse">
             <a:avLst/>
           </a:prstGeom>
           <a:solidFill>
-            <a:srgbClr val="EBDCD6"/>
+            <a:srgbClr val="F6DFD5"/>
           </a:solidFill>
           <a:ln w="19050">
-            <a:solidFill>
-              <a:srgbClr val="855A47"/>
-            </a:solidFill>
+            <a:noFill/>
             <a:prstDash val="dash"/>
           </a:ln>
         </p:spPr>
@@ -4199,7 +4321,7 @@
             <a:r>
               <a:rPr sz="1200" b="0" i="0">
                 <a:solidFill>
-                  <a:srgbClr val="422D24"/>
+                  <a:srgbClr val="8E8780"/>
                 </a:solidFill>
               </a:rPr>
               <a:t>사진</a:t>
@@ -4209,13 +4331,13 @@
       </p:sp>
       <p:sp>
         <p:nvSpPr>
-          <p:cNvPr id="18" name="TextBox 17"/>
+          <p:cNvPr id="19" name="TextBox 18"/>
           <p:cNvSpPr txBox="1"/>
           <p:nvPr/>
         </p:nvSpPr>
         <p:spPr>
           <a:xfrm>
-            <a:off x="8066836" y="3045409"/>
+            <a:off x="8066836" y="3228289"/>
             <a:ext cx="1628089" cy="411480"/>
           </a:xfrm>
           <a:prstGeom prst="rect">
@@ -4237,7 +4359,7 @@
             <a:r>
               <a:rPr sz="1600" b="1" i="0">
                 <a:solidFill>
-                  <a:srgbClr val="422D24"/>
+                  <a:srgbClr val="493127"/>
                 </a:solidFill>
               </a:rPr>
               <a:t>큰아이</a:t>
@@ -4247,14 +4369,14 @@
       </p:sp>
       <p:sp>
         <p:nvSpPr>
-          <p:cNvPr id="19" name="TextBox 18"/>
+          <p:cNvPr id="20" name="TextBox 19"/>
           <p:cNvSpPr txBox="1"/>
           <p:nvPr/>
         </p:nvSpPr>
         <p:spPr>
           <a:xfrm>
-            <a:off x="8158276" y="3502609"/>
-            <a:ext cx="1445209" cy="2898190"/>
+            <a:off x="8158276" y="3685489"/>
+            <a:ext cx="1445209" cy="2669590"/>
           </a:xfrm>
           <a:prstGeom prst="rect">
             <a:avLst/>
@@ -4315,25 +4437,23 @@
       </p:sp>
       <p:sp>
         <p:nvSpPr>
-          <p:cNvPr id="20" name="사진 자리"/>
+          <p:cNvPr id="21" name="사진 자리"/>
           <p:cNvSpPr/>
           <p:nvPr/>
         </p:nvSpPr>
         <p:spPr>
           <a:xfrm>
-            <a:off x="10060686" y="1600200"/>
+            <a:off x="10060686" y="1783080"/>
             <a:ext cx="1353769" cy="1353769"/>
           </a:xfrm>
           <a:prstGeom prst="ellipse">
             <a:avLst/>
           </a:prstGeom>
           <a:solidFill>
-            <a:srgbClr val="EBDCD6"/>
+            <a:srgbClr val="F6DFD5"/>
           </a:solidFill>
           <a:ln w="19050">
-            <a:solidFill>
-              <a:srgbClr val="855A47"/>
-            </a:solidFill>
+            <a:noFill/>
             <a:prstDash val="dash"/>
           </a:ln>
         </p:spPr>
@@ -4351,7 +4471,7 @@
             <a:r>
               <a:rPr sz="1200" b="0" i="0">
                 <a:solidFill>
-                  <a:srgbClr val="422D24"/>
+                  <a:srgbClr val="8E8780"/>
                 </a:solidFill>
               </a:rPr>
               <a:t>사진</a:t>
@@ -4361,13 +4481,13 @@
       </p:sp>
       <p:sp>
         <p:nvSpPr>
-          <p:cNvPr id="21" name="TextBox 20"/>
+          <p:cNvPr id="22" name="TextBox 21"/>
           <p:cNvSpPr txBox="1"/>
           <p:nvPr/>
         </p:nvSpPr>
         <p:spPr>
           <a:xfrm>
-            <a:off x="9923526" y="3045409"/>
+            <a:off x="9923526" y="3228289"/>
             <a:ext cx="1628089" cy="411480"/>
           </a:xfrm>
           <a:prstGeom prst="rect">
@@ -4389,7 +4509,7 @@
             <a:r>
               <a:rPr sz="1600" b="1" i="0">
                 <a:solidFill>
-                  <a:srgbClr val="422D24"/>
+                  <a:srgbClr val="493127"/>
                 </a:solidFill>
               </a:rPr>
               <a:t>작은아이</a:t>
@@ -4399,14 +4519,14 @@
       </p:sp>
       <p:sp>
         <p:nvSpPr>
-          <p:cNvPr id="22" name="TextBox 21"/>
+          <p:cNvPr id="23" name="TextBox 22"/>
           <p:cNvSpPr txBox="1"/>
           <p:nvPr/>
         </p:nvSpPr>
         <p:spPr>
           <a:xfrm>
-            <a:off x="10014965" y="3502609"/>
-            <a:ext cx="1445209" cy="2898190"/>
+            <a:off x="10014965" y="3685489"/>
+            <a:ext cx="1445209" cy="2669590"/>
           </a:xfrm>
           <a:prstGeom prst="rect">
             <a:avLst/>
@@ -4479,7 +4599,7 @@
     <p:bg>
       <p:bgPr>
         <a:solidFill>
-          <a:srgbClr val="FFFFFF"/>
+          <a:srgbClr val="F6DFD5"/>
         </a:solidFill>
         <a:effectLst/>
       </p:bgPr>
@@ -4499,14 +4619,14 @@
         </p:nvSpPr>
         <p:spPr>
           <a:xfrm>
-            <a:off x="9905695" y="-1463040"/>
-            <a:ext cx="3840480" cy="3840480"/>
-          </a:xfrm>
-          <a:prstGeom prst="ellipse">
+            <a:off x="640080" y="566928"/>
+            <a:ext cx="10911535" cy="10972"/>
+          </a:xfrm>
+          <a:prstGeom prst="rect">
             <a:avLst/>
           </a:prstGeom>
           <a:solidFill>
-            <a:srgbClr val="EBDCD6"/>
+            <a:srgbClr val="26231F"/>
           </a:solidFill>
           <a:ln>
             <a:noFill/>
@@ -4522,20 +4642,58 @@
       </p:sp>
       <p:sp>
         <p:nvSpPr>
-          <p:cNvPr id="4" name="장식"/>
+          <p:cNvPr id="4" name="상단 라벨"/>
+          <p:cNvSpPr txBox="1"/>
+          <p:nvPr/>
+        </p:nvSpPr>
+        <p:spPr>
+          <a:xfrm>
+            <a:off x="640080" y="237744"/>
+            <a:ext cx="5486400" cy="274320"/>
+          </a:xfrm>
+          <a:prstGeom prst="rect">
+            <a:avLst/>
+          </a:prstGeom>
+          <a:noFill/>
+        </p:spPr>
+        <p:txBody>
+          <a:bodyPr wrap="square" lIns="54864" rIns="54864" tIns="27432" bIns="27432" anchor="ctr">
+            <a:noAutofit/>
+          </a:bodyPr>
+          <a:lstStyle/>
+          <a:p>
+            <a:pPr algn="l">
+              <a:lnSpc>
+                <a:spcPct val="115000"/>
+              </a:lnSpc>
+            </a:pPr>
+            <a:r>
+              <a:rPr sz="900" b="1" i="0" spc="250">
+                <a:solidFill>
+                  <a:srgbClr val="26231F"/>
+                </a:solidFill>
+              </a:rPr>
+              <a:t>FAMILY ALBUM</a:t>
+            </a:r>
+          </a:p>
+        </p:txBody>
+      </p:sp>
+      <p:sp>
+        <p:nvSpPr>
+          <p:cNvPr id="5" name="포인트"/>
           <p:cNvSpPr/>
           <p:nvPr/>
         </p:nvSpPr>
         <p:spPr>
           <a:xfrm>
-            <a:off x="11094415" y="274320"/>
-            <a:ext cx="411480" cy="411480"/>
+            <a:off x="11204143" y="246888"/>
+            <a:ext cx="237744" cy="237744"/>
           </a:xfrm>
           <a:prstGeom prst="ellipse">
             <a:avLst/>
           </a:prstGeom>
           <a:solidFill>
-            <a:srgbClr val="855A47"/>
+            <a:srgbClr val="D89579"/>
           </a:solidFill>
           <a:ln>
             <a:noFill/>
@@ -4561,8 +4719,8 @@
         </p:nvSpPr>
         <p:spPr>
           <a:xfrm>
-            <a:off x="640080" y="457200"/>
-            <a:ext cx="9722815" cy="868680"/>
+            <a:off x="640080" y="731520"/>
+            <a:ext cx="10911535" cy="822960"/>
           </a:xfrm>
         </p:spPr>
         <p:txBody>
@@ -4579,7 +4737,7 @@
             <a:r>
               <a:rPr sz="3000" b="1" i="0">
                 <a:solidFill>
-                  <a:srgbClr val="422D24"/>
+                  <a:srgbClr val="26231F"/>
                 </a:solidFill>
               </a:rPr>
               <a:t>우리 가족 이야기</a:t>
@@ -4589,20 +4747,20 @@
       </p:sp>
       <p:sp>
         <p:nvSpPr>
-          <p:cNvPr id="5" name="타임라인 선"/>
+          <p:cNvPr id="6" name="타임라인 선"/>
           <p:cNvSpPr/>
           <p:nvPr/>
         </p:nvSpPr>
         <p:spPr>
           <a:xfrm>
-            <a:off x="640080" y="3337560"/>
+            <a:off x="640080" y="3520440"/>
             <a:ext cx="10911535" cy="54864"/>
           </a:xfrm>
           <a:prstGeom prst="rect">
             <a:avLst/>
           </a:prstGeom>
           <a:solidFill>
-            <a:srgbClr val="EBDCD6"/>
+            <a:srgbClr val="F6DFD5"/>
           </a:solidFill>
           <a:ln>
             <a:noFill/>
@@ -4618,20 +4776,20 @@
       </p:sp>
       <p:sp>
         <p:nvSpPr>
-          <p:cNvPr id="6" name="때 1"/>
+          <p:cNvPr id="7" name="때 1"/>
           <p:cNvSpPr/>
           <p:nvPr/>
         </p:nvSpPr>
         <p:spPr>
           <a:xfrm>
-            <a:off x="1802853" y="3154680"/>
+            <a:off x="1802853" y="3337560"/>
             <a:ext cx="402336" cy="402336"/>
           </a:xfrm>
           <a:prstGeom prst="ellipse">
             <a:avLst/>
           </a:prstGeom>
           <a:solidFill>
-            <a:srgbClr val="855A47"/>
+            <a:srgbClr val="D89579"/>
           </a:solidFill>
           <a:ln w="38100">
             <a:solidFill>
@@ -4649,13 +4807,13 @@
       </p:sp>
       <p:sp>
         <p:nvSpPr>
-          <p:cNvPr id="7" name="TextBox 6"/>
+          <p:cNvPr id="8" name="TextBox 7"/>
           <p:cNvSpPr txBox="1"/>
           <p:nvPr/>
         </p:nvSpPr>
         <p:spPr>
           <a:xfrm>
-            <a:off x="685800" y="2514600"/>
+            <a:off x="685800" y="2697480"/>
             <a:ext cx="2636443" cy="457200"/>
           </a:xfrm>
           <a:prstGeom prst="rect">
@@ -4677,7 +4835,7 @@
             <a:r>
               <a:rPr sz="1600" b="1" i="0">
                 <a:solidFill>
-                  <a:srgbClr val="855A47"/>
+                  <a:srgbClr val="D89579"/>
                 </a:solidFill>
               </a:rPr>
               <a:t>할아버지 할머니의 이야기</a:t>
@@ -4687,13 +4845,13 @@
       </p:sp>
       <p:sp>
         <p:nvSpPr>
-          <p:cNvPr id="8" name="TextBox 7"/>
+          <p:cNvPr id="9" name="TextBox 8"/>
           <p:cNvSpPr txBox="1"/>
           <p:nvPr/>
         </p:nvSpPr>
         <p:spPr>
           <a:xfrm>
-            <a:off x="731519" y="3703320"/>
+            <a:off x="731519" y="3886200"/>
             <a:ext cx="2545003" cy="457200"/>
           </a:xfrm>
           <a:prstGeom prst="rect">
@@ -4715,7 +4873,7 @@
             <a:r>
               <a:rPr sz="1800" b="1" i="0">
                 <a:solidFill>
-                  <a:srgbClr val="422D24"/>
+                  <a:srgbClr val="493127"/>
                 </a:solidFill>
               </a:rPr>
               <a:t>뿌리</a:t>
@@ -4725,13 +4883,13 @@
       </p:sp>
       <p:sp>
         <p:nvSpPr>
-          <p:cNvPr id="9" name="TextBox 8"/>
+          <p:cNvPr id="10" name="TextBox 9"/>
           <p:cNvSpPr txBox="1"/>
           <p:nvPr/>
         </p:nvSpPr>
         <p:spPr>
           <a:xfrm>
-            <a:off x="731519" y="4206240"/>
+            <a:off x="731519" y="4389120"/>
             <a:ext cx="2545003" cy="1645920"/>
           </a:xfrm>
           <a:prstGeom prst="rect">
@@ -4753,7 +4911,7 @@
             <a:r>
               <a:rPr sz="1500" b="0" i="0">
                 <a:solidFill>
-                  <a:srgbClr val="2B2B2B"/>
+                  <a:srgbClr val="26231F"/>
                 </a:solidFill>
               </a:rPr>
               <a:t>가족의 시작을 적어요</a:t>
@@ -4763,20 +4921,20 @@
       </p:sp>
       <p:sp>
         <p:nvSpPr>
-          <p:cNvPr id="10" name="때 2"/>
+          <p:cNvPr id="11" name="때 2"/>
           <p:cNvSpPr/>
           <p:nvPr/>
         </p:nvSpPr>
         <p:spPr>
           <a:xfrm>
-            <a:off x="4530737" y="3154680"/>
+            <a:off x="4530737" y="3337560"/>
             <a:ext cx="402336" cy="402336"/>
           </a:xfrm>
           <a:prstGeom prst="ellipse">
             <a:avLst/>
           </a:prstGeom>
           <a:solidFill>
-            <a:srgbClr val="855A47"/>
+            <a:srgbClr val="D89579"/>
           </a:solidFill>
           <a:ln w="38100">
             <a:solidFill>
@@ -4794,13 +4952,13 @@
       </p:sp>
       <p:sp>
         <p:nvSpPr>
-          <p:cNvPr id="11" name="TextBox 10"/>
+          <p:cNvPr id="12" name="TextBox 11"/>
           <p:cNvSpPr txBox="1"/>
           <p:nvPr/>
         </p:nvSpPr>
         <p:spPr>
           <a:xfrm>
-            <a:off x="3413683" y="2514600"/>
+            <a:off x="3413683" y="2697480"/>
             <a:ext cx="2636443" cy="457200"/>
           </a:xfrm>
           <a:prstGeom prst="rect">
@@ -4822,7 +4980,7 @@
             <a:r>
               <a:rPr sz="1600" b="1" i="0">
                 <a:solidFill>
-                  <a:srgbClr val="855A47"/>
+                  <a:srgbClr val="D89579"/>
                 </a:solidFill>
               </a:rPr>
               <a:t>부모가 된 날</a:t>
@@ -4832,13 +4990,13 @@
       </p:sp>
       <p:sp>
         <p:nvSpPr>
-          <p:cNvPr id="12" name="TextBox 11"/>
+          <p:cNvPr id="13" name="TextBox 12"/>
           <p:cNvSpPr txBox="1"/>
           <p:nvPr/>
         </p:nvSpPr>
         <p:spPr>
           <a:xfrm>
-            <a:off x="3459403" y="3703320"/>
+            <a:off x="3459403" y="3886200"/>
             <a:ext cx="2545003" cy="457200"/>
           </a:xfrm>
           <a:prstGeom prst="rect">
@@ -4860,7 +5018,7 @@
             <a:r>
               <a:rPr sz="1800" b="1" i="0">
                 <a:solidFill>
-                  <a:srgbClr val="422D24"/>
+                  <a:srgbClr val="493127"/>
                 </a:solidFill>
               </a:rPr>
               <a:t>새로운 가지</a:t>
@@ -4870,13 +5028,13 @@
       </p:sp>
       <p:sp>
         <p:nvSpPr>
-          <p:cNvPr id="13" name="TextBox 12"/>
+          <p:cNvPr id="14" name="TextBox 13"/>
           <p:cNvSpPr txBox="1"/>
           <p:nvPr/>
         </p:nvSpPr>
         <p:spPr>
           <a:xfrm>
-            <a:off x="3459403" y="4206240"/>
+            <a:off x="3459403" y="4389120"/>
             <a:ext cx="2545003" cy="1645920"/>
           </a:xfrm>
           <a:prstGeom prst="rect">
@@ -4898,7 +5056,7 @@
             <a:r>
               <a:rPr sz="1500" b="0" i="0">
                 <a:solidFill>
-                  <a:srgbClr val="2B2B2B"/>
+                  <a:srgbClr val="26231F"/>
                 </a:solidFill>
               </a:rPr>
               <a:t>그날의 기억을 적어요</a:t>
@@ -4908,20 +5066,20 @@
       </p:sp>
       <p:sp>
         <p:nvSpPr>
-          <p:cNvPr id="14" name="때 3"/>
+          <p:cNvPr id="15" name="때 3"/>
           <p:cNvSpPr/>
           <p:nvPr/>
         </p:nvSpPr>
         <p:spPr>
           <a:xfrm>
-            <a:off x="7258621" y="3154680"/>
+            <a:off x="7258621" y="3337560"/>
             <a:ext cx="402336" cy="402336"/>
           </a:xfrm>
           <a:prstGeom prst="ellipse">
             <a:avLst/>
           </a:prstGeom>
           <a:solidFill>
-            <a:srgbClr val="855A47"/>
+            <a:srgbClr val="D89579"/>
           </a:solidFill>
           <a:ln w="38100">
             <a:solidFill>
@@ -4939,13 +5097,13 @@
       </p:sp>
       <p:sp>
         <p:nvSpPr>
-          <p:cNvPr id="15" name="TextBox 14"/>
+          <p:cNvPr id="16" name="TextBox 15"/>
           <p:cNvSpPr txBox="1"/>
           <p:nvPr/>
         </p:nvSpPr>
         <p:spPr>
           <a:xfrm>
-            <a:off x="6141567" y="2514600"/>
+            <a:off x="6141567" y="2697480"/>
             <a:ext cx="2636443" cy="457200"/>
           </a:xfrm>
           <a:prstGeom prst="rect">
@@ -4967,7 +5125,7 @@
             <a:r>
               <a:rPr sz="1600" b="1" i="0">
                 <a:solidFill>
-                  <a:srgbClr val="855A47"/>
+                  <a:srgbClr val="D89579"/>
                 </a:solidFill>
               </a:rPr>
               <a:t>온 가족 모임</a:t>
@@ -4977,13 +5135,13 @@
       </p:sp>
       <p:sp>
         <p:nvSpPr>
-          <p:cNvPr id="16" name="TextBox 15"/>
+          <p:cNvPr id="17" name="TextBox 16"/>
           <p:cNvSpPr txBox="1"/>
           <p:nvPr/>
         </p:nvSpPr>
         <p:spPr>
           <a:xfrm>
-            <a:off x="6187287" y="3703320"/>
+            <a:off x="6187287" y="3886200"/>
             <a:ext cx="2545003" cy="457200"/>
           </a:xfrm>
           <a:prstGeom prst="rect">
@@ -5005,7 +5163,7 @@
             <a:r>
               <a:rPr sz="1800" b="1" i="0">
                 <a:solidFill>
-                  <a:srgbClr val="422D24"/>
+                  <a:srgbClr val="493127"/>
                 </a:solidFill>
               </a:rPr>
               <a:t>한자리에 모인 날</a:t>
@@ -5015,13 +5173,13 @@
       </p:sp>
       <p:sp>
         <p:nvSpPr>
-          <p:cNvPr id="17" name="TextBox 16"/>
+          <p:cNvPr id="18" name="TextBox 17"/>
           <p:cNvSpPr txBox="1"/>
           <p:nvPr/>
         </p:nvSpPr>
         <p:spPr>
           <a:xfrm>
-            <a:off x="6187287" y="4206240"/>
+            <a:off x="6187287" y="4389120"/>
             <a:ext cx="2545003" cy="1645920"/>
           </a:xfrm>
           <a:prstGeom prst="rect">
@@ -5043,7 +5201,7 @@
             <a:r>
               <a:rPr sz="1500" b="0" i="0">
                 <a:solidFill>
-                  <a:srgbClr val="2B2B2B"/>
+                  <a:srgbClr val="26231F"/>
                 </a:solidFill>
               </a:rPr>
               <a:t>가장 즐거웠던 명절</a:t>
@@ -5053,20 +5211,20 @@
       </p:sp>
       <p:sp>
         <p:nvSpPr>
-          <p:cNvPr id="18" name="때 4"/>
+          <p:cNvPr id="19" name="때 4"/>
           <p:cNvSpPr/>
           <p:nvPr/>
         </p:nvSpPr>
         <p:spPr>
           <a:xfrm>
-            <a:off x="9986505" y="3154680"/>
+            <a:off x="9986505" y="3337560"/>
             <a:ext cx="402336" cy="402336"/>
           </a:xfrm>
           <a:prstGeom prst="ellipse">
             <a:avLst/>
           </a:prstGeom>
           <a:solidFill>
-            <a:srgbClr val="855A47"/>
+            <a:srgbClr val="D89579"/>
           </a:solidFill>
           <a:ln w="38100">
             <a:solidFill>
@@ -5084,13 +5242,13 @@
       </p:sp>
       <p:sp>
         <p:nvSpPr>
-          <p:cNvPr id="19" name="TextBox 18"/>
+          <p:cNvPr id="20" name="TextBox 19"/>
           <p:cNvSpPr txBox="1"/>
           <p:nvPr/>
         </p:nvSpPr>
         <p:spPr>
           <a:xfrm>
-            <a:off x="8869451" y="2514600"/>
+            <a:off x="8869451" y="2697480"/>
             <a:ext cx="2636443" cy="457200"/>
           </a:xfrm>
           <a:prstGeom prst="rect">
@@ -5112,7 +5270,7 @@
             <a:r>
               <a:rPr sz="1600" b="1" i="0">
                 <a:solidFill>
-                  <a:srgbClr val="855A47"/>
+                  <a:srgbClr val="D89579"/>
                 </a:solidFill>
               </a:rPr>
               <a:t>지금</a:t>
@@ -5122,13 +5280,13 @@
       </p:sp>
       <p:sp>
         <p:nvSpPr>
-          <p:cNvPr id="20" name="TextBox 19"/>
+          <p:cNvPr id="21" name="TextBox 20"/>
           <p:cNvSpPr txBox="1"/>
           <p:nvPr/>
         </p:nvSpPr>
         <p:spPr>
           <a:xfrm>
-            <a:off x="8915171" y="3703320"/>
+            <a:off x="8915171" y="3886200"/>
             <a:ext cx="2545003" cy="457200"/>
           </a:xfrm>
           <a:prstGeom prst="rect">
@@ -5150,7 +5308,7 @@
             <a:r>
               <a:rPr sz="1800" b="1" i="0">
                 <a:solidFill>
-                  <a:srgbClr val="422D24"/>
+                  <a:srgbClr val="493127"/>
                 </a:solidFill>
               </a:rPr>
               <a:t>오늘의 우리</a:t>
@@ -5160,13 +5318,13 @@
       </p:sp>
       <p:sp>
         <p:nvSpPr>
-          <p:cNvPr id="21" name="TextBox 20"/>
+          <p:cNvPr id="22" name="TextBox 21"/>
           <p:cNvSpPr txBox="1"/>
           <p:nvPr/>
         </p:nvSpPr>
         <p:spPr>
           <a:xfrm>
-            <a:off x="8915171" y="4206240"/>
+            <a:off x="8915171" y="4389120"/>
             <a:ext cx="2545003" cy="1645920"/>
           </a:xfrm>
           <a:prstGeom prst="rect">
@@ -5188,7 +5346,7 @@
             <a:r>
               <a:rPr sz="1500" b="0" i="0">
                 <a:solidFill>
-                  <a:srgbClr val="2B2B2B"/>
+                  <a:srgbClr val="26231F"/>
                 </a:solidFill>
               </a:rPr>
               <a:t>요즘 우리 이야기</a:t>
@@ -5210,7 +5368,7 @@
     <p:bg>
       <p:bgPr>
         <a:solidFill>
-          <a:srgbClr val="FFFFFF"/>
+          <a:srgbClr val="F6DFD5"/>
         </a:solidFill>
         <a:effectLst/>
       </p:bgPr>
@@ -5230,14 +5388,14 @@
         </p:nvSpPr>
         <p:spPr>
           <a:xfrm>
-            <a:off x="9905695" y="-1463040"/>
-            <a:ext cx="3840480" cy="3840480"/>
-          </a:xfrm>
-          <a:prstGeom prst="ellipse">
+            <a:off x="640080" y="566928"/>
+            <a:ext cx="10911535" cy="10972"/>
+          </a:xfrm>
+          <a:prstGeom prst="rect">
             <a:avLst/>
           </a:prstGeom>
           <a:solidFill>
-            <a:srgbClr val="EBDCD6"/>
+            <a:srgbClr val="26231F"/>
           </a:solidFill>
           <a:ln>
             <a:noFill/>
@@ -5253,20 +5411,58 @@
       </p:sp>
       <p:sp>
         <p:nvSpPr>
-          <p:cNvPr id="4" name="장식"/>
+          <p:cNvPr id="4" name="상단 라벨"/>
+          <p:cNvSpPr txBox="1"/>
+          <p:nvPr/>
+        </p:nvSpPr>
+        <p:spPr>
+          <a:xfrm>
+            <a:off x="640080" y="237744"/>
+            <a:ext cx="5486400" cy="274320"/>
+          </a:xfrm>
+          <a:prstGeom prst="rect">
+            <a:avLst/>
+          </a:prstGeom>
+          <a:noFill/>
+        </p:spPr>
+        <p:txBody>
+          <a:bodyPr wrap="square" lIns="54864" rIns="54864" tIns="27432" bIns="27432" anchor="ctr">
+            <a:noAutofit/>
+          </a:bodyPr>
+          <a:lstStyle/>
+          <a:p>
+            <a:pPr algn="l">
+              <a:lnSpc>
+                <a:spcPct val="115000"/>
+              </a:lnSpc>
+            </a:pPr>
+            <a:r>
+              <a:rPr sz="900" b="1" i="0" spc="250">
+                <a:solidFill>
+                  <a:srgbClr val="26231F"/>
+                </a:solidFill>
+              </a:rPr>
+              <a:t>FAMILY ALBUM</a:t>
+            </a:r>
+          </a:p>
+        </p:txBody>
+      </p:sp>
+      <p:sp>
+        <p:nvSpPr>
+          <p:cNvPr id="5" name="포인트"/>
           <p:cNvSpPr/>
           <p:nvPr/>
         </p:nvSpPr>
         <p:spPr>
           <a:xfrm>
-            <a:off x="11094415" y="274320"/>
-            <a:ext cx="411480" cy="411480"/>
+            <a:off x="11204143" y="246888"/>
+            <a:ext cx="237744" cy="237744"/>
           </a:xfrm>
           <a:prstGeom prst="ellipse">
             <a:avLst/>
           </a:prstGeom>
           <a:solidFill>
-            <a:srgbClr val="855A47"/>
+            <a:srgbClr val="D89579"/>
           </a:solidFill>
           <a:ln>
             <a:noFill/>
@@ -5292,8 +5488,8 @@
         </p:nvSpPr>
         <p:spPr>
           <a:xfrm>
-            <a:off x="640080" y="457200"/>
-            <a:ext cx="9722815" cy="868680"/>
+            <a:off x="640080" y="731520"/>
+            <a:ext cx="10911535" cy="822960"/>
           </a:xfrm>
         </p:spPr>
         <p:txBody>
@@ -5310,7 +5506,7 @@
             <a:r>
               <a:rPr sz="3000" b="1" i="0">
                 <a:solidFill>
-                  <a:srgbClr val="422D24"/>
+                  <a:srgbClr val="26231F"/>
                 </a:solidFill>
               </a:rPr>
               <a:t>우리 가족의 약속</a:t>
@@ -5320,357 +5516,80 @@
       </p:sp>
       <p:sp>
         <p:nvSpPr>
-          <p:cNvPr id="5" name="줄 1"/>
+          <p:cNvPr id="6" name="줄 1"/>
           <p:cNvSpPr/>
           <p:nvPr/>
         </p:nvSpPr>
         <p:spPr>
           <a:xfrm>
-            <a:off x="640080" y="1600200"/>
+            <a:off x="640080" y="1783080"/>
             <a:ext cx="10911535" cy="1005840"/>
           </a:xfrm>
           <a:prstGeom prst="roundRect">
             <a:avLst>
-              <a:gd name="adj" fmla="val 8000"/>
+              <a:gd name="adj" fmla="val 4000"/>
             </a:avLst>
           </a:prstGeom>
           <a:solidFill>
-            <a:srgbClr val="F8F4F2"/>
-          </a:solidFill>
-          <a:ln w="12700">
-            <a:solidFill>
-              <a:srgbClr val="EBDCD6"/>
-            </a:solidFill>
-          </a:ln>
-        </p:spPr>
-        <p:txBody>
-          <a:bodyPr rtlCol="0" anchor="ctr"/>
-          <a:lstStyle/>
-          <a:p>
-            <a:pPr algn="ctr"/>
-          </a:p>
-        </p:txBody>
-      </p:sp>
-      <p:sp>
-        <p:nvSpPr>
-          <p:cNvPr id="6" name="번호 1"/>
-          <p:cNvSpPr/>
-          <p:nvPr/>
-        </p:nvSpPr>
-        <p:spPr>
-          <a:xfrm>
-            <a:off x="822959" y="1874519"/>
-            <a:ext cx="457200" cy="457200"/>
-          </a:xfrm>
-          <a:prstGeom prst="ellipse">
-            <a:avLst/>
-          </a:prstGeom>
-          <a:solidFill>
-            <a:srgbClr val="855A47"/>
+            <a:srgbClr val="FBF1EC"/>
           </a:solidFill>
           <a:ln>
             <a:noFill/>
           </a:ln>
         </p:spPr>
         <p:txBody>
-          <a:bodyPr rtlCol="0" anchor="ctr" wrap="square" lIns="54864" rIns="54864" tIns="27432" bIns="27432">
-            <a:noAutofit/>
-          </a:bodyPr>
-          <a:lstStyle/>
-          <a:p>
-            <a:pPr algn="ctr">
-              <a:lnSpc>
-                <a:spcPct val="100000"/>
-              </a:lnSpc>
-            </a:pPr>
-            <a:r>
-              <a:rPr sz="1600" b="1" i="0">
-                <a:solidFill>
-                  <a:srgbClr val="FFFFFF"/>
-                </a:solidFill>
-              </a:rPr>
-              <a:t>1</a:t>
-            </a:r>
-          </a:p>
-        </p:txBody>
-      </p:sp>
-      <p:sp>
-        <p:nvSpPr>
-          <p:cNvPr id="7" name="TextBox 6"/>
-          <p:cNvSpPr txBox="1"/>
-          <p:nvPr/>
-        </p:nvSpPr>
-        <p:spPr>
-          <a:xfrm>
-            <a:off x="1508760" y="1645920"/>
-            <a:ext cx="2743200" cy="914400"/>
+          <a:bodyPr rtlCol="0" anchor="ctr"/>
+          <a:lstStyle/>
+          <a:p>
+            <a:pPr algn="ctr"/>
+          </a:p>
+        </p:txBody>
+      </p:sp>
+      <p:sp>
+        <p:nvSpPr>
+          <p:cNvPr id="7" name="포인트 막대"/>
+          <p:cNvSpPr/>
+          <p:nvPr/>
+        </p:nvSpPr>
+        <p:spPr>
+          <a:xfrm>
+            <a:off x="640080" y="1892807"/>
+            <a:ext cx="54864" cy="786384"/>
           </a:xfrm>
           <a:prstGeom prst="rect">
             <a:avLst/>
           </a:prstGeom>
-          <a:noFill/>
-        </p:spPr>
-        <p:txBody>
-          <a:bodyPr wrap="square" lIns="54864" rIns="54864" tIns="27432" bIns="27432" anchor="ctr">
-            <a:noAutofit/>
-          </a:bodyPr>
-          <a:lstStyle/>
-          <a:p>
-            <a:pPr algn="l">
-              <a:lnSpc>
-                <a:spcPct val="115000"/>
-              </a:lnSpc>
-            </a:pPr>
-            <a:r>
-              <a:rPr sz="1800" b="1" i="0">
-                <a:solidFill>
-                  <a:srgbClr val="422D24"/>
-                </a:solidFill>
-              </a:rPr>
-              <a:t>약속 1</a:t>
-            </a:r>
-          </a:p>
-        </p:txBody>
-      </p:sp>
-      <p:sp>
-        <p:nvSpPr>
-          <p:cNvPr id="8" name="TextBox 7"/>
-          <p:cNvSpPr txBox="1"/>
-          <p:nvPr/>
-        </p:nvSpPr>
-        <p:spPr>
-          <a:xfrm>
-            <a:off x="4297680" y="1645920"/>
-            <a:ext cx="7071055" cy="914400"/>
-          </a:xfrm>
-          <a:prstGeom prst="rect">
-            <a:avLst/>
-          </a:prstGeom>
-          <a:noFill/>
-        </p:spPr>
-        <p:txBody>
-          <a:bodyPr wrap="square" lIns="54864" rIns="54864" tIns="27432" bIns="27432" anchor="ctr">
-            <a:noAutofit/>
-          </a:bodyPr>
-          <a:lstStyle/>
-          <a:p>
-            <a:pPr algn="l">
-              <a:lnSpc>
-                <a:spcPct val="115000"/>
-              </a:lnSpc>
-            </a:pPr>
-            <a:r>
-              <a:rPr sz="1700" b="0" i="0">
-                <a:solidFill>
-                  <a:srgbClr val="2B2B2B"/>
-                </a:solidFill>
-              </a:rPr>
-              <a:t>명절에는 모두 한자리에 모이기</a:t>
-            </a:r>
-          </a:p>
-        </p:txBody>
-      </p:sp>
-      <p:sp>
-        <p:nvSpPr>
-          <p:cNvPr id="9" name="줄 2"/>
-          <p:cNvSpPr/>
-          <p:nvPr/>
-        </p:nvSpPr>
-        <p:spPr>
-          <a:xfrm>
-            <a:off x="640080" y="2743200"/>
-            <a:ext cx="10911535" cy="1005840"/>
-          </a:xfrm>
-          <a:prstGeom prst="roundRect">
-            <a:avLst>
-              <a:gd name="adj" fmla="val 8000"/>
-            </a:avLst>
-          </a:prstGeom>
           <a:solidFill>
-            <a:srgbClr val="F8F4F2"/>
-          </a:solidFill>
-          <a:ln w="12700">
-            <a:solidFill>
-              <a:srgbClr val="EBDCD6"/>
-            </a:solidFill>
-          </a:ln>
-        </p:spPr>
-        <p:txBody>
-          <a:bodyPr rtlCol="0" anchor="ctr"/>
-          <a:lstStyle/>
-          <a:p>
-            <a:pPr algn="ctr"/>
-          </a:p>
-        </p:txBody>
-      </p:sp>
-      <p:sp>
-        <p:nvSpPr>
-          <p:cNvPr id="10" name="번호 2"/>
-          <p:cNvSpPr/>
-          <p:nvPr/>
-        </p:nvSpPr>
-        <p:spPr>
-          <a:xfrm>
-            <a:off x="822959" y="3017520"/>
-            <a:ext cx="457200" cy="457200"/>
-          </a:xfrm>
-          <a:prstGeom prst="ellipse">
-            <a:avLst/>
-          </a:prstGeom>
-          <a:solidFill>
-            <a:srgbClr val="855A47"/>
+            <a:srgbClr val="D89579"/>
           </a:solidFill>
           <a:ln>
             <a:noFill/>
           </a:ln>
         </p:spPr>
         <p:txBody>
-          <a:bodyPr rtlCol="0" anchor="ctr" wrap="square" lIns="54864" rIns="54864" tIns="27432" bIns="27432">
-            <a:noAutofit/>
-          </a:bodyPr>
-          <a:lstStyle/>
-          <a:p>
-            <a:pPr algn="ctr">
-              <a:lnSpc>
-                <a:spcPct val="100000"/>
-              </a:lnSpc>
-            </a:pPr>
-            <a:r>
-              <a:rPr sz="1600" b="1" i="0">
-                <a:solidFill>
-                  <a:srgbClr val="FFFFFF"/>
-                </a:solidFill>
-              </a:rPr>
-              <a:t>2</a:t>
-            </a:r>
-          </a:p>
-        </p:txBody>
-      </p:sp>
-      <p:sp>
-        <p:nvSpPr>
-          <p:cNvPr id="11" name="TextBox 10"/>
-          <p:cNvSpPr txBox="1"/>
-          <p:nvPr/>
-        </p:nvSpPr>
-        <p:spPr>
-          <a:xfrm>
-            <a:off x="1508760" y="2788920"/>
-            <a:ext cx="2743200" cy="914400"/>
-          </a:xfrm>
-          <a:prstGeom prst="rect">
-            <a:avLst/>
-          </a:prstGeom>
-          <a:noFill/>
-        </p:spPr>
-        <p:txBody>
-          <a:bodyPr wrap="square" lIns="54864" rIns="54864" tIns="27432" bIns="27432" anchor="ctr">
-            <a:noAutofit/>
-          </a:bodyPr>
-          <a:lstStyle/>
-          <a:p>
-            <a:pPr algn="l">
-              <a:lnSpc>
-                <a:spcPct val="115000"/>
-              </a:lnSpc>
-            </a:pPr>
-            <a:r>
-              <a:rPr sz="1800" b="1" i="0">
-                <a:solidFill>
-                  <a:srgbClr val="422D24"/>
-                </a:solidFill>
-              </a:rPr>
-              <a:t>약속 2</a:t>
-            </a:r>
-          </a:p>
-        </p:txBody>
-      </p:sp>
-      <p:sp>
-        <p:nvSpPr>
-          <p:cNvPr id="12" name="TextBox 11"/>
-          <p:cNvSpPr txBox="1"/>
-          <p:nvPr/>
-        </p:nvSpPr>
-        <p:spPr>
-          <a:xfrm>
-            <a:off x="4297680" y="2788920"/>
-            <a:ext cx="7071055" cy="914400"/>
-          </a:xfrm>
-          <a:prstGeom prst="rect">
-            <a:avLst/>
-          </a:prstGeom>
-          <a:noFill/>
-        </p:spPr>
-        <p:txBody>
-          <a:bodyPr wrap="square" lIns="54864" rIns="54864" tIns="27432" bIns="27432" anchor="ctr">
-            <a:noAutofit/>
-          </a:bodyPr>
-          <a:lstStyle/>
-          <a:p>
-            <a:pPr algn="l">
-              <a:lnSpc>
-                <a:spcPct val="115000"/>
-              </a:lnSpc>
-            </a:pPr>
-            <a:r>
-              <a:rPr sz="1700" b="0" i="0">
-                <a:solidFill>
-                  <a:srgbClr val="2B2B2B"/>
-                </a:solidFill>
-              </a:rPr>
-              <a:t>어른께 먼저 안부 전하기</a:t>
-            </a:r>
-          </a:p>
-        </p:txBody>
-      </p:sp>
-      <p:sp>
-        <p:nvSpPr>
-          <p:cNvPr id="13" name="줄 3"/>
+          <a:bodyPr rtlCol="0" anchor="ctr"/>
+          <a:lstStyle/>
+          <a:p>
+            <a:pPr algn="ctr"/>
+          </a:p>
+        </p:txBody>
+      </p:sp>
+      <p:sp>
+        <p:nvSpPr>
+          <p:cNvPr id="8" name="번호 1"/>
           <p:cNvSpPr/>
           <p:nvPr/>
         </p:nvSpPr>
         <p:spPr>
           <a:xfrm>
-            <a:off x="640080" y="3886200"/>
-            <a:ext cx="10911535" cy="1005840"/>
-          </a:xfrm>
-          <a:prstGeom prst="roundRect">
-            <a:avLst>
-              <a:gd name="adj" fmla="val 8000"/>
-            </a:avLst>
+            <a:off x="822959" y="2057400"/>
+            <a:ext cx="457200" cy="457200"/>
+          </a:xfrm>
+          <a:prstGeom prst="ellipse">
+            <a:avLst/>
           </a:prstGeom>
           <a:solidFill>
-            <a:srgbClr val="F8F4F2"/>
-          </a:solidFill>
-          <a:ln w="12700">
-            <a:solidFill>
-              <a:srgbClr val="EBDCD6"/>
-            </a:solidFill>
-          </a:ln>
-        </p:spPr>
-        <p:txBody>
-          <a:bodyPr rtlCol="0" anchor="ctr"/>
-          <a:lstStyle/>
-          <a:p>
-            <a:pPr algn="ctr"/>
-          </a:p>
-        </p:txBody>
-      </p:sp>
-      <p:sp>
-        <p:nvSpPr>
-          <p:cNvPr id="14" name="번호 3"/>
-          <p:cNvSpPr/>
-          <p:nvPr/>
-        </p:nvSpPr>
-        <p:spPr>
-          <a:xfrm>
-            <a:off x="822959" y="4160520"/>
-            <a:ext cx="457200" cy="457200"/>
-          </a:xfrm>
-          <a:prstGeom prst="ellipse">
-            <a:avLst/>
-          </a:prstGeom>
-          <a:solidFill>
-            <a:srgbClr val="855A47"/>
+            <a:srgbClr val="D89579"/>
           </a:solidFill>
           <a:ln>
             <a:noFill/>
@@ -5690,23 +5609,23 @@
             <a:r>
               <a:rPr sz="1600" b="1" i="0">
                 <a:solidFill>
-                  <a:srgbClr val="FFFFFF"/>
-                </a:solidFill>
-              </a:rPr>
-              <a:t>3</a:t>
-            </a:r>
-          </a:p>
-        </p:txBody>
-      </p:sp>
-      <p:sp>
-        <p:nvSpPr>
-          <p:cNvPr id="15" name="TextBox 14"/>
+                  <a:srgbClr val="26231F"/>
+                </a:solidFill>
+              </a:rPr>
+              <a:t>1</a:t>
+            </a:r>
+          </a:p>
+        </p:txBody>
+      </p:sp>
+      <p:sp>
+        <p:nvSpPr>
+          <p:cNvPr id="9" name="TextBox 8"/>
           <p:cNvSpPr txBox="1"/>
           <p:nvPr/>
         </p:nvSpPr>
         <p:spPr>
           <a:xfrm>
-            <a:off x="1508760" y="3931920"/>
+            <a:off x="1508760" y="1828800"/>
             <a:ext cx="2743200" cy="914400"/>
           </a:xfrm>
           <a:prstGeom prst="rect">
@@ -5728,23 +5647,23 @@
             <a:r>
               <a:rPr sz="1800" b="1" i="0">
                 <a:solidFill>
-                  <a:srgbClr val="422D24"/>
-                </a:solidFill>
-              </a:rPr>
-              <a:t>약속 3</a:t>
-            </a:r>
-          </a:p>
-        </p:txBody>
-      </p:sp>
-      <p:sp>
-        <p:nvSpPr>
-          <p:cNvPr id="16" name="TextBox 15"/>
+                  <a:srgbClr val="493127"/>
+                </a:solidFill>
+              </a:rPr>
+              <a:t>약속 1</a:t>
+            </a:r>
+          </a:p>
+        </p:txBody>
+      </p:sp>
+      <p:sp>
+        <p:nvSpPr>
+          <p:cNvPr id="10" name="TextBox 9"/>
           <p:cNvSpPr txBox="1"/>
           <p:nvPr/>
         </p:nvSpPr>
         <p:spPr>
           <a:xfrm>
-            <a:off x="4297680" y="3931920"/>
+            <a:off x="4297680" y="1828800"/>
             <a:ext cx="7071055" cy="914400"/>
           </a:xfrm>
           <a:prstGeom prst="rect">
@@ -5766,7 +5685,365 @@
             <a:r>
               <a:rPr sz="1700" b="0" i="0">
                 <a:solidFill>
-                  <a:srgbClr val="2B2B2B"/>
+                  <a:srgbClr val="26231F"/>
+                </a:solidFill>
+              </a:rPr>
+              <a:t>명절에는 모두 한자리에 모이기</a:t>
+            </a:r>
+          </a:p>
+        </p:txBody>
+      </p:sp>
+      <p:sp>
+        <p:nvSpPr>
+          <p:cNvPr id="11" name="줄 2"/>
+          <p:cNvSpPr/>
+          <p:nvPr/>
+        </p:nvSpPr>
+        <p:spPr>
+          <a:xfrm>
+            <a:off x="640080" y="2926080"/>
+            <a:ext cx="10911535" cy="1005840"/>
+          </a:xfrm>
+          <a:prstGeom prst="roundRect">
+            <a:avLst>
+              <a:gd name="adj" fmla="val 4000"/>
+            </a:avLst>
+          </a:prstGeom>
+          <a:solidFill>
+            <a:srgbClr val="FBF1EC"/>
+          </a:solidFill>
+          <a:ln>
+            <a:noFill/>
+          </a:ln>
+        </p:spPr>
+        <p:txBody>
+          <a:bodyPr rtlCol="0" anchor="ctr"/>
+          <a:lstStyle/>
+          <a:p>
+            <a:pPr algn="ctr"/>
+          </a:p>
+        </p:txBody>
+      </p:sp>
+      <p:sp>
+        <p:nvSpPr>
+          <p:cNvPr id="12" name="포인트 막대"/>
+          <p:cNvSpPr/>
+          <p:nvPr/>
+        </p:nvSpPr>
+        <p:spPr>
+          <a:xfrm>
+            <a:off x="640080" y="3035808"/>
+            <a:ext cx="54864" cy="786384"/>
+          </a:xfrm>
+          <a:prstGeom prst="rect">
+            <a:avLst/>
+          </a:prstGeom>
+          <a:solidFill>
+            <a:srgbClr val="D89579"/>
+          </a:solidFill>
+          <a:ln>
+            <a:noFill/>
+          </a:ln>
+        </p:spPr>
+        <p:txBody>
+          <a:bodyPr rtlCol="0" anchor="ctr"/>
+          <a:lstStyle/>
+          <a:p>
+            <a:pPr algn="ctr"/>
+          </a:p>
+        </p:txBody>
+      </p:sp>
+      <p:sp>
+        <p:nvSpPr>
+          <p:cNvPr id="13" name="번호 2"/>
+          <p:cNvSpPr/>
+          <p:nvPr/>
+        </p:nvSpPr>
+        <p:spPr>
+          <a:xfrm>
+            <a:off x="822959" y="3200400"/>
+            <a:ext cx="457200" cy="457200"/>
+          </a:xfrm>
+          <a:prstGeom prst="ellipse">
+            <a:avLst/>
+          </a:prstGeom>
+          <a:solidFill>
+            <a:srgbClr val="D89579"/>
+          </a:solidFill>
+          <a:ln>
+            <a:noFill/>
+          </a:ln>
+        </p:spPr>
+        <p:txBody>
+          <a:bodyPr rtlCol="0" anchor="ctr" wrap="square" lIns="54864" rIns="54864" tIns="27432" bIns="27432">
+            <a:noAutofit/>
+          </a:bodyPr>
+          <a:lstStyle/>
+          <a:p>
+            <a:pPr algn="ctr">
+              <a:lnSpc>
+                <a:spcPct val="100000"/>
+              </a:lnSpc>
+            </a:pPr>
+            <a:r>
+              <a:rPr sz="1600" b="1" i="0">
+                <a:solidFill>
+                  <a:srgbClr val="26231F"/>
+                </a:solidFill>
+              </a:rPr>
+              <a:t>2</a:t>
+            </a:r>
+          </a:p>
+        </p:txBody>
+      </p:sp>
+      <p:sp>
+        <p:nvSpPr>
+          <p:cNvPr id="14" name="TextBox 13"/>
+          <p:cNvSpPr txBox="1"/>
+          <p:nvPr/>
+        </p:nvSpPr>
+        <p:spPr>
+          <a:xfrm>
+            <a:off x="1508760" y="2971800"/>
+            <a:ext cx="2743200" cy="914400"/>
+          </a:xfrm>
+          <a:prstGeom prst="rect">
+            <a:avLst/>
+          </a:prstGeom>
+          <a:noFill/>
+        </p:spPr>
+        <p:txBody>
+          <a:bodyPr wrap="square" lIns="54864" rIns="54864" tIns="27432" bIns="27432" anchor="ctr">
+            <a:noAutofit/>
+          </a:bodyPr>
+          <a:lstStyle/>
+          <a:p>
+            <a:pPr algn="l">
+              <a:lnSpc>
+                <a:spcPct val="115000"/>
+              </a:lnSpc>
+            </a:pPr>
+            <a:r>
+              <a:rPr sz="1800" b="1" i="0">
+                <a:solidFill>
+                  <a:srgbClr val="493127"/>
+                </a:solidFill>
+              </a:rPr>
+              <a:t>약속 2</a:t>
+            </a:r>
+          </a:p>
+        </p:txBody>
+      </p:sp>
+      <p:sp>
+        <p:nvSpPr>
+          <p:cNvPr id="15" name="TextBox 14"/>
+          <p:cNvSpPr txBox="1"/>
+          <p:nvPr/>
+        </p:nvSpPr>
+        <p:spPr>
+          <a:xfrm>
+            <a:off x="4297680" y="2971800"/>
+            <a:ext cx="7071055" cy="914400"/>
+          </a:xfrm>
+          <a:prstGeom prst="rect">
+            <a:avLst/>
+          </a:prstGeom>
+          <a:noFill/>
+        </p:spPr>
+        <p:txBody>
+          <a:bodyPr wrap="square" lIns="54864" rIns="54864" tIns="27432" bIns="27432" anchor="ctr">
+            <a:noAutofit/>
+          </a:bodyPr>
+          <a:lstStyle/>
+          <a:p>
+            <a:pPr algn="l">
+              <a:lnSpc>
+                <a:spcPct val="115000"/>
+              </a:lnSpc>
+            </a:pPr>
+            <a:r>
+              <a:rPr sz="1700" b="0" i="0">
+                <a:solidFill>
+                  <a:srgbClr val="26231F"/>
+                </a:solidFill>
+              </a:rPr>
+              <a:t>어른께 먼저 안부 전하기</a:t>
+            </a:r>
+          </a:p>
+        </p:txBody>
+      </p:sp>
+      <p:sp>
+        <p:nvSpPr>
+          <p:cNvPr id="16" name="줄 3"/>
+          <p:cNvSpPr/>
+          <p:nvPr/>
+        </p:nvSpPr>
+        <p:spPr>
+          <a:xfrm>
+            <a:off x="640080" y="4069080"/>
+            <a:ext cx="10911535" cy="1005840"/>
+          </a:xfrm>
+          <a:prstGeom prst="roundRect">
+            <a:avLst>
+              <a:gd name="adj" fmla="val 4000"/>
+            </a:avLst>
+          </a:prstGeom>
+          <a:solidFill>
+            <a:srgbClr val="FBF1EC"/>
+          </a:solidFill>
+          <a:ln>
+            <a:noFill/>
+          </a:ln>
+        </p:spPr>
+        <p:txBody>
+          <a:bodyPr rtlCol="0" anchor="ctr"/>
+          <a:lstStyle/>
+          <a:p>
+            <a:pPr algn="ctr"/>
+          </a:p>
+        </p:txBody>
+      </p:sp>
+      <p:sp>
+        <p:nvSpPr>
+          <p:cNvPr id="17" name="포인트 막대"/>
+          <p:cNvSpPr/>
+          <p:nvPr/>
+        </p:nvSpPr>
+        <p:spPr>
+          <a:xfrm>
+            <a:off x="640080" y="4178808"/>
+            <a:ext cx="54864" cy="786384"/>
+          </a:xfrm>
+          <a:prstGeom prst="rect">
+            <a:avLst/>
+          </a:prstGeom>
+          <a:solidFill>
+            <a:srgbClr val="D89579"/>
+          </a:solidFill>
+          <a:ln>
+            <a:noFill/>
+          </a:ln>
+        </p:spPr>
+        <p:txBody>
+          <a:bodyPr rtlCol="0" anchor="ctr"/>
+          <a:lstStyle/>
+          <a:p>
+            <a:pPr algn="ctr"/>
+          </a:p>
+        </p:txBody>
+      </p:sp>
+      <p:sp>
+        <p:nvSpPr>
+          <p:cNvPr id="18" name="번호 3"/>
+          <p:cNvSpPr/>
+          <p:nvPr/>
+        </p:nvSpPr>
+        <p:spPr>
+          <a:xfrm>
+            <a:off x="822959" y="4343400"/>
+            <a:ext cx="457200" cy="457200"/>
+          </a:xfrm>
+          <a:prstGeom prst="ellipse">
+            <a:avLst/>
+          </a:prstGeom>
+          <a:solidFill>
+            <a:srgbClr val="D89579"/>
+          </a:solidFill>
+          <a:ln>
+            <a:noFill/>
+          </a:ln>
+        </p:spPr>
+        <p:txBody>
+          <a:bodyPr rtlCol="0" anchor="ctr" wrap="square" lIns="54864" rIns="54864" tIns="27432" bIns="27432">
+            <a:noAutofit/>
+          </a:bodyPr>
+          <a:lstStyle/>
+          <a:p>
+            <a:pPr algn="ctr">
+              <a:lnSpc>
+                <a:spcPct val="100000"/>
+              </a:lnSpc>
+            </a:pPr>
+            <a:r>
+              <a:rPr sz="1600" b="1" i="0">
+                <a:solidFill>
+                  <a:srgbClr val="26231F"/>
+                </a:solidFill>
+              </a:rPr>
+              <a:t>3</a:t>
+            </a:r>
+          </a:p>
+        </p:txBody>
+      </p:sp>
+      <p:sp>
+        <p:nvSpPr>
+          <p:cNvPr id="19" name="TextBox 18"/>
+          <p:cNvSpPr txBox="1"/>
+          <p:nvPr/>
+        </p:nvSpPr>
+        <p:spPr>
+          <a:xfrm>
+            <a:off x="1508760" y="4114800"/>
+            <a:ext cx="2743200" cy="914400"/>
+          </a:xfrm>
+          <a:prstGeom prst="rect">
+            <a:avLst/>
+          </a:prstGeom>
+          <a:noFill/>
+        </p:spPr>
+        <p:txBody>
+          <a:bodyPr wrap="square" lIns="54864" rIns="54864" tIns="27432" bIns="27432" anchor="ctr">
+            <a:noAutofit/>
+          </a:bodyPr>
+          <a:lstStyle/>
+          <a:p>
+            <a:pPr algn="l">
+              <a:lnSpc>
+                <a:spcPct val="115000"/>
+              </a:lnSpc>
+            </a:pPr>
+            <a:r>
+              <a:rPr sz="1800" b="1" i="0">
+                <a:solidFill>
+                  <a:srgbClr val="493127"/>
+                </a:solidFill>
+              </a:rPr>
+              <a:t>약속 3</a:t>
+            </a:r>
+          </a:p>
+        </p:txBody>
+      </p:sp>
+      <p:sp>
+        <p:nvSpPr>
+          <p:cNvPr id="20" name="TextBox 19"/>
+          <p:cNvSpPr txBox="1"/>
+          <p:nvPr/>
+        </p:nvSpPr>
+        <p:spPr>
+          <a:xfrm>
+            <a:off x="4297680" y="4114800"/>
+            <a:ext cx="7071055" cy="914400"/>
+          </a:xfrm>
+          <a:prstGeom prst="rect">
+            <a:avLst/>
+          </a:prstGeom>
+          <a:noFill/>
+        </p:spPr>
+        <p:txBody>
+          <a:bodyPr wrap="square" lIns="54864" rIns="54864" tIns="27432" bIns="27432" anchor="ctr">
+            <a:noAutofit/>
+          </a:bodyPr>
+          <a:lstStyle/>
+          <a:p>
+            <a:pPr algn="l">
+              <a:lnSpc>
+                <a:spcPct val="115000"/>
+              </a:lnSpc>
+            </a:pPr>
+            <a:r>
+              <a:rPr sz="1700" b="0" i="0">
+                <a:solidFill>
+                  <a:srgbClr val="26231F"/>
                 </a:solidFill>
               </a:rPr>
               <a:t>한 달에 한 번 가족 식사</a:t>
@@ -5788,7 +6065,7 @@
     <p:bg>
       <p:bgPr>
         <a:solidFill>
-          <a:srgbClr val="FFFFFF"/>
+          <a:srgbClr val="F6DFD5"/>
         </a:solidFill>
         <a:effectLst/>
       </p:bgPr>
@@ -5808,14 +6085,14 @@
         </p:nvSpPr>
         <p:spPr>
           <a:xfrm>
-            <a:off x="9905695" y="-1463040"/>
-            <a:ext cx="3840480" cy="3840480"/>
-          </a:xfrm>
-          <a:prstGeom prst="ellipse">
+            <a:off x="640080" y="566928"/>
+            <a:ext cx="10911535" cy="10972"/>
+          </a:xfrm>
+          <a:prstGeom prst="rect">
             <a:avLst/>
           </a:prstGeom>
           <a:solidFill>
-            <a:srgbClr val="EBDCD6"/>
+            <a:srgbClr val="26231F"/>
           </a:solidFill>
           <a:ln>
             <a:noFill/>
@@ -5831,20 +6108,58 @@
       </p:sp>
       <p:sp>
         <p:nvSpPr>
-          <p:cNvPr id="4" name="장식"/>
+          <p:cNvPr id="4" name="상단 라벨"/>
+          <p:cNvSpPr txBox="1"/>
+          <p:nvPr/>
+        </p:nvSpPr>
+        <p:spPr>
+          <a:xfrm>
+            <a:off x="640080" y="237744"/>
+            <a:ext cx="5486400" cy="274320"/>
+          </a:xfrm>
+          <a:prstGeom prst="rect">
+            <a:avLst/>
+          </a:prstGeom>
+          <a:noFill/>
+        </p:spPr>
+        <p:txBody>
+          <a:bodyPr wrap="square" lIns="54864" rIns="54864" tIns="27432" bIns="27432" anchor="ctr">
+            <a:noAutofit/>
+          </a:bodyPr>
+          <a:lstStyle/>
+          <a:p>
+            <a:pPr algn="l">
+              <a:lnSpc>
+                <a:spcPct val="115000"/>
+              </a:lnSpc>
+            </a:pPr>
+            <a:r>
+              <a:rPr sz="900" b="1" i="0" spc="250">
+                <a:solidFill>
+                  <a:srgbClr val="26231F"/>
+                </a:solidFill>
+              </a:rPr>
+              <a:t>FAMILY ALBUM</a:t>
+            </a:r>
+          </a:p>
+        </p:txBody>
+      </p:sp>
+      <p:sp>
+        <p:nvSpPr>
+          <p:cNvPr id="5" name="포인트"/>
           <p:cNvSpPr/>
           <p:nvPr/>
         </p:nvSpPr>
         <p:spPr>
           <a:xfrm>
-            <a:off x="11094415" y="274320"/>
-            <a:ext cx="411480" cy="411480"/>
+            <a:off x="11204143" y="246888"/>
+            <a:ext cx="237744" cy="237744"/>
           </a:xfrm>
           <a:prstGeom prst="ellipse">
             <a:avLst/>
           </a:prstGeom>
           <a:solidFill>
-            <a:srgbClr val="855A47"/>
+            <a:srgbClr val="D89579"/>
           </a:solidFill>
           <a:ln>
             <a:noFill/>
@@ -5870,8 +6185,8 @@
         </p:nvSpPr>
         <p:spPr>
           <a:xfrm>
-            <a:off x="640080" y="457200"/>
-            <a:ext cx="9722815" cy="868680"/>
+            <a:off x="640080" y="731520"/>
+            <a:ext cx="10911535" cy="822960"/>
           </a:xfrm>
         </p:spPr>
         <p:txBody>
@@ -5888,7 +6203,7 @@
             <a:r>
               <a:rPr sz="3000" b="1" i="0">
                 <a:solidFill>
-                  <a:srgbClr val="422D24"/>
+                  <a:srgbClr val="26231F"/>
                 </a:solidFill>
               </a:rPr>
               <a:t>가족 사진</a:t>
@@ -5898,14 +6213,14 @@
       </p:sp>
       <p:sp>
         <p:nvSpPr>
-          <p:cNvPr id="5" name="사진 자리"/>
+          <p:cNvPr id="6" name="사진 자리"/>
           <p:cNvSpPr/>
           <p:nvPr/>
         </p:nvSpPr>
         <p:spPr>
           <a:xfrm>
-            <a:off x="640080" y="1600200"/>
-            <a:ext cx="3515258" cy="2308860"/>
+            <a:off x="640080" y="1783080"/>
+            <a:ext cx="3515258" cy="2194560"/>
           </a:xfrm>
           <a:prstGeom prst="roundRect">
             <a:avLst>
@@ -5913,12 +6228,10 @@
             </a:avLst>
           </a:prstGeom>
           <a:solidFill>
-            <a:srgbClr val="EBDCD6"/>
+            <a:srgbClr val="F6DFD5"/>
           </a:solidFill>
           <a:ln w="19050">
-            <a:solidFill>
-              <a:srgbClr val="855A47"/>
-            </a:solidFill>
+            <a:noFill/>
             <a:prstDash val="dash"/>
           </a:ln>
         </p:spPr>
@@ -5936,7 +6249,7 @@
             <a:r>
               <a:rPr sz="1200" b="0" i="0">
                 <a:solidFill>
-                  <a:srgbClr val="422D24"/>
+                  <a:srgbClr val="8E8780"/>
                 </a:solidFill>
               </a:rPr>
               <a:t>사진 1</a:t>
@@ -5946,14 +6259,14 @@
       </p:sp>
       <p:sp>
         <p:nvSpPr>
-          <p:cNvPr id="6" name="사진 자리"/>
+          <p:cNvPr id="7" name="사진 자리"/>
           <p:cNvSpPr/>
           <p:nvPr/>
         </p:nvSpPr>
         <p:spPr>
           <a:xfrm>
-            <a:off x="4338218" y="1600200"/>
-            <a:ext cx="3515258" cy="2308860"/>
+            <a:off x="4338218" y="1783080"/>
+            <a:ext cx="3515258" cy="2194560"/>
           </a:xfrm>
           <a:prstGeom prst="roundRect">
             <a:avLst>
@@ -5961,12 +6274,10 @@
             </a:avLst>
           </a:prstGeom>
           <a:solidFill>
-            <a:srgbClr val="EBDCD6"/>
+            <a:srgbClr val="F6DFD5"/>
           </a:solidFill>
           <a:ln w="19050">
-            <a:solidFill>
-              <a:srgbClr val="855A47"/>
-            </a:solidFill>
+            <a:noFill/>
             <a:prstDash val="dash"/>
           </a:ln>
         </p:spPr>
@@ -5984,7 +6295,7 @@
             <a:r>
               <a:rPr sz="1200" b="0" i="0">
                 <a:solidFill>
-                  <a:srgbClr val="422D24"/>
+                  <a:srgbClr val="8E8780"/>
                 </a:solidFill>
               </a:rPr>
               <a:t>사진 2</a:t>
@@ -5994,14 +6305,14 @@
       </p:sp>
       <p:sp>
         <p:nvSpPr>
-          <p:cNvPr id="7" name="사진 자리"/>
+          <p:cNvPr id="8" name="사진 자리"/>
           <p:cNvSpPr/>
           <p:nvPr/>
         </p:nvSpPr>
         <p:spPr>
           <a:xfrm>
-            <a:off x="8036356" y="1600200"/>
-            <a:ext cx="3515258" cy="2308860"/>
+            <a:off x="8036356" y="1783080"/>
+            <a:ext cx="3515258" cy="2194560"/>
           </a:xfrm>
           <a:prstGeom prst="roundRect">
             <a:avLst>
@@ -6009,12 +6320,10 @@
             </a:avLst>
           </a:prstGeom>
           <a:solidFill>
-            <a:srgbClr val="EBDCD6"/>
+            <a:srgbClr val="F6DFD5"/>
           </a:solidFill>
           <a:ln w="19050">
-            <a:solidFill>
-              <a:srgbClr val="855A47"/>
-            </a:solidFill>
+            <a:noFill/>
             <a:prstDash val="dash"/>
           </a:ln>
         </p:spPr>
@@ -6032,7 +6341,7 @@
             <a:r>
               <a:rPr sz="1200" b="0" i="0">
                 <a:solidFill>
-                  <a:srgbClr val="422D24"/>
+                  <a:srgbClr val="8E8780"/>
                 </a:solidFill>
               </a:rPr>
               <a:t>사진 3</a:t>
@@ -6042,14 +6351,14 @@
       </p:sp>
       <p:sp>
         <p:nvSpPr>
-          <p:cNvPr id="8" name="사진 자리"/>
+          <p:cNvPr id="9" name="사진 자리"/>
           <p:cNvSpPr/>
           <p:nvPr/>
         </p:nvSpPr>
         <p:spPr>
           <a:xfrm>
-            <a:off x="640080" y="4091939"/>
-            <a:ext cx="3515258" cy="2308860"/>
+            <a:off x="640080" y="4160520"/>
+            <a:ext cx="3515258" cy="2194560"/>
           </a:xfrm>
           <a:prstGeom prst="roundRect">
             <a:avLst>
@@ -6057,12 +6366,10 @@
             </a:avLst>
           </a:prstGeom>
           <a:solidFill>
-            <a:srgbClr val="EBDCD6"/>
+            <a:srgbClr val="F6DFD5"/>
           </a:solidFill>
           <a:ln w="19050">
-            <a:solidFill>
-              <a:srgbClr val="855A47"/>
-            </a:solidFill>
+            <a:noFill/>
             <a:prstDash val="dash"/>
           </a:ln>
         </p:spPr>
@@ -6080,7 +6387,7 @@
             <a:r>
               <a:rPr sz="1200" b="0" i="0">
                 <a:solidFill>
-                  <a:srgbClr val="422D24"/>
+                  <a:srgbClr val="8E8780"/>
                 </a:solidFill>
               </a:rPr>
               <a:t>사진 4</a:t>
@@ -6090,14 +6397,14 @@
       </p:sp>
       <p:sp>
         <p:nvSpPr>
-          <p:cNvPr id="9" name="사진 자리"/>
+          <p:cNvPr id="10" name="사진 자리"/>
           <p:cNvSpPr/>
           <p:nvPr/>
         </p:nvSpPr>
         <p:spPr>
           <a:xfrm>
-            <a:off x="4338218" y="4091939"/>
-            <a:ext cx="3515258" cy="2308860"/>
+            <a:off x="4338218" y="4160520"/>
+            <a:ext cx="3515258" cy="2194560"/>
           </a:xfrm>
           <a:prstGeom prst="roundRect">
             <a:avLst>
@@ -6105,12 +6412,10 @@
             </a:avLst>
           </a:prstGeom>
           <a:solidFill>
-            <a:srgbClr val="EBDCD6"/>
+            <a:srgbClr val="F6DFD5"/>
           </a:solidFill>
           <a:ln w="19050">
-            <a:solidFill>
-              <a:srgbClr val="855A47"/>
-            </a:solidFill>
+            <a:noFill/>
             <a:prstDash val="dash"/>
           </a:ln>
         </p:spPr>
@@ -6128,7 +6433,7 @@
             <a:r>
               <a:rPr sz="1200" b="0" i="0">
                 <a:solidFill>
-                  <a:srgbClr val="422D24"/>
+                  <a:srgbClr val="8E8780"/>
                 </a:solidFill>
               </a:rPr>
               <a:t>사진 5</a:t>
@@ -6138,14 +6443,14 @@
       </p:sp>
       <p:sp>
         <p:nvSpPr>
-          <p:cNvPr id="10" name="사진 자리"/>
+          <p:cNvPr id="11" name="사진 자리"/>
           <p:cNvSpPr/>
           <p:nvPr/>
         </p:nvSpPr>
         <p:spPr>
           <a:xfrm>
-            <a:off x="8036356" y="4091939"/>
-            <a:ext cx="3515258" cy="2308860"/>
+            <a:off x="8036356" y="4160520"/>
+            <a:ext cx="3515258" cy="2194560"/>
           </a:xfrm>
           <a:prstGeom prst="roundRect">
             <a:avLst>
@@ -6153,12 +6458,10 @@
             </a:avLst>
           </a:prstGeom>
           <a:solidFill>
-            <a:srgbClr val="EBDCD6"/>
+            <a:srgbClr val="F6DFD5"/>
           </a:solidFill>
           <a:ln w="19050">
-            <a:solidFill>
-              <a:srgbClr val="855A47"/>
-            </a:solidFill>
+            <a:noFill/>
             <a:prstDash val="dash"/>
           </a:ln>
         </p:spPr>
@@ -6176,7 +6479,7 @@
             <a:r>
               <a:rPr sz="1200" b="0" i="0">
                 <a:solidFill>
-                  <a:srgbClr val="422D24"/>
+                  <a:srgbClr val="8E8780"/>
                 </a:solidFill>
               </a:rPr>
               <a:t>사진 6</a:t>
@@ -6195,6 +6498,14 @@
 <file path=ppt/slides/slide6.xml><?xml version="1.0" encoding="utf-8"?>
 <p:sld xmlns:a="http://schemas.openxmlformats.org/drawingml/2006/main" xmlns:p="http://schemas.openxmlformats.org/presentationml/2006/main" xmlns:r="http://schemas.openxmlformats.org/officeDocument/2006/relationships">
   <p:cSld>
+    <p:bg>
+      <p:bgPr>
+        <a:solidFill>
+          <a:srgbClr val="FBF1EC"/>
+        </a:solidFill>
+        <a:effectLst/>
+      </p:bgPr>
+    </p:bg>
     <p:spTree>
       <p:nvGrpSpPr>
         <p:cNvPr id="1" name=""/>
@@ -6202,30 +6513,116 @@
         <p:nvPr/>
       </p:nvGrpSpPr>
       <p:grpSpPr/>
-      <p:pic>
-        <p:nvPicPr>
-          <p:cNvPr id="3" name="표지 그림" descr="family-33.jpg"/>
-          <p:cNvPicPr>
-            <a:picLocks noChangeAspect="1"/>
-          </p:cNvPicPr>
-          <p:nvPr/>
-        </p:nvPicPr>
-        <p:blipFill>
-          <a:blip r:embed="rId2"/>
-          <a:stretch>
-            <a:fillRect/>
-          </a:stretch>
-        </p:blipFill>
+      <p:sp>
+        <p:nvSpPr>
+          <p:cNvPr id="3" name="사진 자리"/>
+          <p:cNvSpPr/>
+          <p:nvPr/>
+        </p:nvSpPr>
         <p:spPr>
           <a:xfrm>
             <a:off x="0" y="0"/>
-            <a:ext cx="12191695" cy="6858000"/>
+            <a:ext cx="4389010" cy="6858000"/>
           </a:xfrm>
           <a:prstGeom prst="rect">
             <a:avLst/>
           </a:prstGeom>
-        </p:spPr>
-      </p:pic>
+          <a:solidFill>
+            <a:srgbClr val="EBC0AD"/>
+          </a:solidFill>
+          <a:ln>
+            <a:noFill/>
+          </a:ln>
+        </p:spPr>
+        <p:txBody>
+          <a:bodyPr rtlCol="0" anchor="ctr" wrap="square" lIns="54864" rIns="54864" tIns="27432" bIns="27432">
+            <a:noAutofit/>
+          </a:bodyPr>
+          <a:lstStyle/>
+          <a:p>
+            <a:pPr algn="ctr">
+              <a:lnSpc>
+                <a:spcPct val="100000"/>
+              </a:lnSpc>
+            </a:pPr>
+            <a:r>
+              <a:rPr sz="1400" b="0" i="0">
+                <a:solidFill>
+                  <a:srgbClr val="493127"/>
+                </a:solidFill>
+              </a:rPr>
+              <a:t>사진을 넣어 주세요</a:t>
+            </a:r>
+          </a:p>
+        </p:txBody>
+      </p:sp>
+      <p:sp>
+        <p:nvSpPr>
+          <p:cNvPr id="4" name="장식"/>
+          <p:cNvSpPr/>
+          <p:nvPr/>
+        </p:nvSpPr>
+        <p:spPr>
+          <a:xfrm>
+            <a:off x="365750" y="365760"/>
+            <a:ext cx="3657508" cy="6126480"/>
+          </a:xfrm>
+          <a:prstGeom prst="rect">
+            <a:avLst/>
+          </a:prstGeom>
+          <a:noFill/>
+          <a:ln w="9525">
+            <a:solidFill>
+              <a:srgbClr val="26231F"/>
+            </a:solidFill>
+          </a:ln>
+        </p:spPr>
+        <p:txBody>
+          <a:bodyPr rtlCol="0" anchor="ctr"/>
+          <a:lstStyle/>
+          <a:p>
+            <a:pPr algn="ctr"/>
+          </a:p>
+        </p:txBody>
+      </p:sp>
+      <p:sp>
+        <p:nvSpPr>
+          <p:cNvPr id="5" name="라벨"/>
+          <p:cNvSpPr txBox="1"/>
+          <p:nvPr/>
+        </p:nvSpPr>
+        <p:spPr>
+          <a:xfrm>
+            <a:off x="6827349" y="2148840"/>
+            <a:ext cx="4632844" cy="274320"/>
+          </a:xfrm>
+          <a:prstGeom prst="rect">
+            <a:avLst/>
+          </a:prstGeom>
+          <a:noFill/>
+        </p:spPr>
+        <p:txBody>
+          <a:bodyPr wrap="square" lIns="54864" rIns="54864" tIns="27432" bIns="27432" anchor="t">
+            <a:noAutofit/>
+          </a:bodyPr>
+          <a:lstStyle/>
+          <a:p>
+            <a:pPr algn="l">
+              <a:lnSpc>
+                <a:spcPct val="115000"/>
+              </a:lnSpc>
+            </a:pPr>
+            <a:r>
+              <a:rPr sz="1000" b="1" i="0" spc="250">
+                <a:solidFill>
+                  <a:srgbClr val="26231F"/>
+                </a:solidFill>
+              </a:rPr>
+              <a:t>FAMILY ALBUM</a:t>
+            </a:r>
+          </a:p>
+        </p:txBody>
+      </p:sp>
       <p:sp>
         <p:nvSpPr>
           <p:cNvPr id="2" name="Title 1"/>
@@ -6238,8 +6635,8 @@
         </p:nvSpPr>
         <p:spPr>
           <a:xfrm>
-            <a:off x="853418" y="2057400"/>
-            <a:ext cx="6095847" cy="1554480"/>
+            <a:off x="6827349" y="2606040"/>
+            <a:ext cx="4632844" cy="1188720"/>
           </a:xfrm>
         </p:spPr>
         <p:txBody>
@@ -6254,9 +6651,9 @@
               </a:lnSpc>
             </a:pPr>
             <a:r>
-              <a:rPr sz="3600" b="1" i="0">
-                <a:solidFill>
-                  <a:srgbClr val="422D24"/>
+              <a:rPr sz="4000" b="1" i="0">
+                <a:solidFill>
+                  <a:srgbClr val="26231F"/>
                 </a:solidFill>
               </a:rPr>
               <a:t>우리 가족 소개를 마칩니다</a:t>
@@ -6266,14 +6663,14 @@
       </p:sp>
       <p:sp>
         <p:nvSpPr>
-          <p:cNvPr id="4" name="한 줄 문구"/>
+          <p:cNvPr id="6" name="한 줄 문구"/>
           <p:cNvSpPr txBox="1"/>
           <p:nvPr/>
         </p:nvSpPr>
         <p:spPr>
           <a:xfrm>
-            <a:off x="853418" y="3749039"/>
-            <a:ext cx="6095847" cy="822960"/>
+            <a:off x="6827349" y="3886200"/>
+            <a:ext cx="4632844" cy="822960"/>
           </a:xfrm>
           <a:prstGeom prst="rect">
             <a:avLst/>
@@ -6292,9 +6689,9 @@
               </a:lnSpc>
             </a:pPr>
             <a:r>
-              <a:rPr sz="1700" b="0" i="1">
-                <a:solidFill>
-                  <a:srgbClr val="422D24"/>
+              <a:rPr sz="1700" b="0" i="0">
+                <a:solidFill>
+                  <a:srgbClr val="26231F"/>
                 </a:solidFill>
               </a:rPr>
               <a:t>읽어 주셔서 고맙습니다</a:t>
@@ -6304,14 +6701,14 @@
       </p:sp>
       <p:sp>
         <p:nvSpPr>
-          <p:cNvPr id="5" name="안내 문구"/>
+          <p:cNvPr id="7" name="안내 문구"/>
           <p:cNvSpPr txBox="1"/>
           <p:nvPr/>
         </p:nvSpPr>
         <p:spPr>
           <a:xfrm>
-            <a:off x="853418" y="4617720"/>
-            <a:ext cx="6095847" cy="914400"/>
+            <a:off x="6827349" y="4754880"/>
+            <a:ext cx="4632844" cy="914400"/>
           </a:xfrm>
           <a:prstGeom prst="rect">
             <a:avLst/>
@@ -6332,7 +6729,7 @@
             <a:r>
               <a:rPr sz="1400" b="0" i="0">
                 <a:solidFill>
-                  <a:srgbClr val="666666"/>
+                  <a:srgbClr val="26231F"/>
                 </a:solidFill>
               </a:rPr>
               <a:t>고맙습니다 · 가족 이름</a:t>
@@ -6359,34 +6756,34 @@
         <a:sysClr val="window" lastClr="FFFFFF"/>
       </a:lt1>
       <a:dk2>
-        <a:srgbClr val="422D24"/>
+        <a:srgbClr val="493127"/>
       </a:dk2>
       <a:lt2>
-        <a:srgbClr val="F8F4F2"/>
+        <a:srgbClr val="FBF1EC"/>
       </a:lt2>
       <a:accent1>
-        <a:srgbClr val="855A47"/>
+        <a:srgbClr val="D89579"/>
       </a:accent1>
       <a:accent2>
-        <a:srgbClr val="478578"/>
+        <a:srgbClr val="E1D098"/>
       </a:accent2>
       <a:accent3>
-        <a:srgbClr val="422D24"/>
+        <a:srgbClr val="493127"/>
       </a:accent3>
       <a:accent4>
-        <a:srgbClr val="EBDCD6"/>
+        <a:srgbClr val="F6DFD5"/>
       </a:accent4>
       <a:accent5>
-        <a:srgbClr val="667060"/>
+        <a:srgbClr val="DCB288"/>
       </a:accent5>
       <a:accent6>
-        <a:srgbClr val="8E817C"/>
+        <a:srgbClr val="92837D"/>
       </a:accent6>
       <a:hlink>
-        <a:srgbClr val="855A47"/>
+        <a:srgbClr val="D89579"/>
       </a:hlink>
       <a:folHlink>
-        <a:srgbClr val="422D24"/>
+        <a:srgbClr val="493127"/>
       </a:folHlink>
     </a:clrScheme>
     <a:fontScheme name="Office">
